--- a/courses/ooad/sessions/s12.pptx
+++ b/courses/ooad/sessions/s12.pptx
@@ -418,7 +418,7 @@
   </p:cSld>
   <p:clrMap bg1="lt1" tx1="dk1" bg2="lt2" tx2="dk2" accent1="accent1" accent2="accent2" accent3="accent3" accent4="accent4" accent5="accent5" accent6="accent6" hlink="hlink" folHlink="folHlink"/>
   <p:notesStyle>
-    <a:lvl1pPr marL="0" algn="l" defTabSz="914400" rtl="0" eaLnBrk="1" latinLnBrk="1" hangingPunct="1">
+    <a:lvl1pPr marL="0" algn="l" defTabSz="914400" rtl="0" eaLnBrk="1" latinLnBrk="0" hangingPunct="1">
       <a:defRPr sz="1200" kern="1200">
         <a:solidFill>
           <a:schemeClr val="tx1"/>
@@ -428,7 +428,7 @@
         <a:cs typeface="+mn-cs"/>
       </a:defRPr>
     </a:lvl1pPr>
-    <a:lvl2pPr marL="457200" algn="l" defTabSz="914400" rtl="0" eaLnBrk="1" latinLnBrk="1" hangingPunct="1">
+    <a:lvl2pPr marL="457200" algn="l" defTabSz="914400" rtl="0" eaLnBrk="1" latinLnBrk="0" hangingPunct="1">
       <a:defRPr sz="1200" kern="1200">
         <a:solidFill>
           <a:schemeClr val="tx1"/>
@@ -438,7 +438,7 @@
         <a:cs typeface="+mn-cs"/>
       </a:defRPr>
     </a:lvl2pPr>
-    <a:lvl3pPr marL="914400" algn="l" defTabSz="914400" rtl="0" eaLnBrk="1" latinLnBrk="1" hangingPunct="1">
+    <a:lvl3pPr marL="914400" algn="l" defTabSz="914400" rtl="0" eaLnBrk="1" latinLnBrk="0" hangingPunct="1">
       <a:defRPr sz="1200" kern="1200">
         <a:solidFill>
           <a:schemeClr val="tx1"/>
@@ -448,7 +448,7 @@
         <a:cs typeface="+mn-cs"/>
       </a:defRPr>
     </a:lvl3pPr>
-    <a:lvl4pPr marL="1371600" algn="l" defTabSz="914400" rtl="0" eaLnBrk="1" latinLnBrk="1" hangingPunct="1">
+    <a:lvl4pPr marL="1371600" algn="l" defTabSz="914400" rtl="0" eaLnBrk="1" latinLnBrk="0" hangingPunct="1">
       <a:defRPr sz="1200" kern="1200">
         <a:solidFill>
           <a:schemeClr val="tx1"/>
@@ -458,7 +458,7 @@
         <a:cs typeface="+mn-cs"/>
       </a:defRPr>
     </a:lvl4pPr>
-    <a:lvl5pPr marL="1828800" algn="l" defTabSz="914400" rtl="0" eaLnBrk="1" latinLnBrk="1" hangingPunct="1">
+    <a:lvl5pPr marL="1828800" algn="l" defTabSz="914400" rtl="0" eaLnBrk="1" latinLnBrk="0" hangingPunct="1">
       <a:defRPr sz="1200" kern="1200">
         <a:solidFill>
           <a:schemeClr val="tx1"/>
@@ -468,7 +468,7 @@
         <a:cs typeface="+mn-cs"/>
       </a:defRPr>
     </a:lvl5pPr>
-    <a:lvl6pPr marL="2286000" algn="l" defTabSz="914400" rtl="0" eaLnBrk="1" latinLnBrk="1" hangingPunct="1">
+    <a:lvl6pPr marL="2286000" algn="l" defTabSz="914400" rtl="0" eaLnBrk="1" latinLnBrk="0" hangingPunct="1">
       <a:defRPr sz="1200" kern="1200">
         <a:solidFill>
           <a:schemeClr val="tx1"/>
@@ -478,7 +478,7 @@
         <a:cs typeface="+mn-cs"/>
       </a:defRPr>
     </a:lvl6pPr>
-    <a:lvl7pPr marL="2743200" algn="l" defTabSz="914400" rtl="0" eaLnBrk="1" latinLnBrk="1" hangingPunct="1">
+    <a:lvl7pPr marL="2743200" algn="l" defTabSz="914400" rtl="0" eaLnBrk="1" latinLnBrk="0" hangingPunct="1">
       <a:defRPr sz="1200" kern="1200">
         <a:solidFill>
           <a:schemeClr val="tx1"/>
@@ -488,7 +488,7 @@
         <a:cs typeface="+mn-cs"/>
       </a:defRPr>
     </a:lvl7pPr>
-    <a:lvl8pPr marL="3200400" algn="l" defTabSz="914400" rtl="0" eaLnBrk="1" latinLnBrk="1" hangingPunct="1">
+    <a:lvl8pPr marL="3200400" algn="l" defTabSz="914400" rtl="0" eaLnBrk="1" latinLnBrk="0" hangingPunct="1">
       <a:defRPr sz="1200" kern="1200">
         <a:solidFill>
           <a:schemeClr val="tx1"/>
@@ -498,7 +498,7 @@
         <a:cs typeface="+mn-cs"/>
       </a:defRPr>
     </a:lvl8pPr>
-    <a:lvl9pPr marL="3657600" algn="l" defTabSz="914400" rtl="0" eaLnBrk="1" latinLnBrk="1" hangingPunct="1">
+    <a:lvl9pPr marL="3657600" algn="l" defTabSz="914400" rtl="0" eaLnBrk="1" latinLnBrk="0" hangingPunct="1">
       <a:defRPr sz="1200" kern="1200">
         <a:solidFill>
           <a:schemeClr val="tx1"/>
@@ -567,7 +567,7 @@
             <a:pPr lvl="0"/>
             <a:r>
               <a:rPr lang="ko-KR" sz="1200"/>
-              <a:t>코드 한 줄이지만 계약의 변경이다. 계약이 바뀌면 그 출처 — 상태 기계와 요구 — 도 바뀌어야 한다(「19」).</a:t>
+              <a:t>코드 한 줄이지만 계약의 변경이다. 계약이 바뀌면 그 출처 — 상태 기계와 요구 — 도 바뀌어야 한다(「19. 원인 수준에서 고치기」).</a:t>
             </a:r>
           </a:p>
         </p:txBody>
@@ -2422,7 +2422,7 @@
             <a:pPr lvl="0"/>
             <a:r>
               <a:rPr lang="ko-KR" sz="1200"/>
-              <a:t>재현 테스트는 수정 뒤에도 남긴다. 같은 증상이 다시 나면 개발자 테스트 층에서 잡힌다(「04」).</a:t>
+              <a:t>재현 테스트는 수정 뒤에도 남긴다. 같은 증상이 다시 나면 개발자 테스트 층에서 잡힌다(「04. feedback의 층」).</a:t>
             </a:r>
           </a:p>
         </p:txBody>
@@ -3161,7 +3161,7 @@
   <p:hf hdr="0" ftr="0" dt="0"/>
   <p:txStyles>
     <p:titleStyle>
-      <a:lvl1pPr algn="l" rtl="0" eaLnBrk="0" fontAlgn="base" latinLnBrk="1" hangingPunct="0">
+      <a:lvl1pPr algn="l" rtl="0" eaLnBrk="0" fontAlgn="base" latinLnBrk="0" hangingPunct="0">
         <a:spcBef>
           <a:spcPct val="0"/>
         </a:spcBef>
@@ -3177,7 +3177,7 @@
           <a:cs typeface="+mj-cs"/>
         </a:defRPr>
       </a:lvl1pPr>
-      <a:lvl2pPr algn="l" rtl="0" eaLnBrk="0" fontAlgn="base" latinLnBrk="1" hangingPunct="0">
+      <a:lvl2pPr algn="l" rtl="0" eaLnBrk="0" fontAlgn="base" latinLnBrk="0" hangingPunct="0">
         <a:spcBef>
           <a:spcPct val="0"/>
         </a:spcBef>
@@ -3192,7 +3192,7 @@
           <a:ea typeface="맑은 고딕" pitchFamily="50" charset="-127"/>
         </a:defRPr>
       </a:lvl2pPr>
-      <a:lvl3pPr algn="l" rtl="0" eaLnBrk="0" fontAlgn="base" latinLnBrk="1" hangingPunct="0">
+      <a:lvl3pPr algn="l" rtl="0" eaLnBrk="0" fontAlgn="base" latinLnBrk="0" hangingPunct="0">
         <a:spcBef>
           <a:spcPct val="0"/>
         </a:spcBef>
@@ -3207,7 +3207,7 @@
           <a:ea typeface="맑은 고딕" pitchFamily="50" charset="-127"/>
         </a:defRPr>
       </a:lvl3pPr>
-      <a:lvl4pPr algn="l" rtl="0" eaLnBrk="0" fontAlgn="base" latinLnBrk="1" hangingPunct="0">
+      <a:lvl4pPr algn="l" rtl="0" eaLnBrk="0" fontAlgn="base" latinLnBrk="0" hangingPunct="0">
         <a:spcBef>
           <a:spcPct val="0"/>
         </a:spcBef>
@@ -3222,7 +3222,7 @@
           <a:ea typeface="맑은 고딕" pitchFamily="50" charset="-127"/>
         </a:defRPr>
       </a:lvl4pPr>
-      <a:lvl5pPr algn="l" rtl="0" eaLnBrk="0" fontAlgn="base" latinLnBrk="1" hangingPunct="0">
+      <a:lvl5pPr algn="l" rtl="0" eaLnBrk="0" fontAlgn="base" latinLnBrk="0" hangingPunct="0">
         <a:spcBef>
           <a:spcPct val="0"/>
         </a:spcBef>
@@ -3237,7 +3237,7 @@
           <a:ea typeface="맑은 고딕" pitchFamily="50" charset="-127"/>
         </a:defRPr>
       </a:lvl5pPr>
-      <a:lvl6pPr marL="457200" algn="ctr" rtl="0" fontAlgn="base" latinLnBrk="1">
+      <a:lvl6pPr marL="457200" algn="ctr" rtl="0" fontAlgn="base" latinLnBrk="0">
         <a:spcBef>
           <a:spcPct val="0"/>
         </a:spcBef>
@@ -3252,7 +3252,7 @@
           <a:ea typeface="맑은 고딕" pitchFamily="50" charset="-127"/>
         </a:defRPr>
       </a:lvl6pPr>
-      <a:lvl7pPr marL="914400" algn="ctr" rtl="0" fontAlgn="base" latinLnBrk="1">
+      <a:lvl7pPr marL="914400" algn="ctr" rtl="0" fontAlgn="base" latinLnBrk="0">
         <a:spcBef>
           <a:spcPct val="0"/>
         </a:spcBef>
@@ -3267,7 +3267,7 @@
           <a:ea typeface="맑은 고딕" pitchFamily="50" charset="-127"/>
         </a:defRPr>
       </a:lvl7pPr>
-      <a:lvl8pPr marL="1371600" algn="ctr" rtl="0" fontAlgn="base" latinLnBrk="1">
+      <a:lvl8pPr marL="1371600" algn="ctr" rtl="0" fontAlgn="base" latinLnBrk="0">
         <a:spcBef>
           <a:spcPct val="0"/>
         </a:spcBef>
@@ -3282,7 +3282,7 @@
           <a:ea typeface="맑은 고딕" pitchFamily="50" charset="-127"/>
         </a:defRPr>
       </a:lvl8pPr>
-      <a:lvl9pPr marL="1828800" algn="ctr" rtl="0" fontAlgn="base" latinLnBrk="1">
+      <a:lvl9pPr marL="1828800" algn="ctr" rtl="0" fontAlgn="base" latinLnBrk="0">
         <a:spcBef>
           <a:spcPct val="0"/>
         </a:spcBef>
@@ -3299,7 +3299,7 @@
       </a:lvl9pPr>
     </p:titleStyle>
     <p:bodyStyle>
-      <a:lvl1pPr marL="342900" indent="-342900" algn="l" rtl="0" eaLnBrk="0" fontAlgn="base" latinLnBrk="1" hangingPunct="0">
+      <a:lvl1pPr marL="342900" indent="-342900" algn="l" rtl="0" eaLnBrk="0" fontAlgn="base" latinLnBrk="0" hangingPunct="0">
         <a:spcBef>
           <a:spcPct val="20000"/>
         </a:spcBef>
@@ -3317,7 +3317,7 @@
           <a:cs typeface="+mn-cs"/>
         </a:defRPr>
       </a:lvl1pPr>
-      <a:lvl2pPr marL="742950" indent="-285750" algn="l" rtl="0" eaLnBrk="0" fontAlgn="base" latinLnBrk="1" hangingPunct="0">
+      <a:lvl2pPr marL="742950" indent="-285750" algn="l" rtl="0" eaLnBrk="0" fontAlgn="base" latinLnBrk="0" hangingPunct="0">
         <a:spcBef>
           <a:spcPct val="20000"/>
         </a:spcBef>
@@ -3335,7 +3335,7 @@
           <a:cs typeface="+mn-cs"/>
         </a:defRPr>
       </a:lvl2pPr>
-      <a:lvl3pPr marL="1143000" indent="-228600" algn="l" rtl="0" eaLnBrk="0" fontAlgn="base" latinLnBrk="1" hangingPunct="0">
+      <a:lvl3pPr marL="1143000" indent="-228600" algn="l" rtl="0" eaLnBrk="0" fontAlgn="base" latinLnBrk="0" hangingPunct="0">
         <a:spcBef>
           <a:spcPct val="20000"/>
         </a:spcBef>
@@ -3353,7 +3353,7 @@
           <a:cs typeface="+mn-cs"/>
         </a:defRPr>
       </a:lvl3pPr>
-      <a:lvl4pPr marL="1600200" indent="-228600" algn="l" rtl="0" eaLnBrk="0" fontAlgn="base" latinLnBrk="1" hangingPunct="0">
+      <a:lvl4pPr marL="1600200" indent="-228600" algn="l" rtl="0" eaLnBrk="0" fontAlgn="base" latinLnBrk="0" hangingPunct="0">
         <a:spcBef>
           <a:spcPct val="20000"/>
         </a:spcBef>
@@ -3371,7 +3371,7 @@
           <a:cs typeface="+mn-cs"/>
         </a:defRPr>
       </a:lvl4pPr>
-      <a:lvl5pPr marL="2057400" indent="-228600" algn="l" rtl="0" eaLnBrk="0" fontAlgn="base" latinLnBrk="1" hangingPunct="0">
+      <a:lvl5pPr marL="2057400" indent="-228600" algn="l" rtl="0" eaLnBrk="0" fontAlgn="base" latinLnBrk="0" hangingPunct="0">
         <a:spcBef>
           <a:spcPct val="20000"/>
         </a:spcBef>
@@ -3389,7 +3389,7 @@
           <a:cs typeface="+mn-cs"/>
         </a:defRPr>
       </a:lvl5pPr>
-      <a:lvl6pPr marL="2514600" indent="-228600" algn="l" defTabSz="914400" rtl="0" eaLnBrk="1" latinLnBrk="1" hangingPunct="1">
+      <a:lvl6pPr marL="2514600" indent="-228600" algn="l" defTabSz="914400" rtl="0" eaLnBrk="1" latinLnBrk="0" hangingPunct="1">
         <a:spcBef>
           <a:spcPct val="20000"/>
         </a:spcBef>
@@ -3404,7 +3404,7 @@
           <a:cs typeface="+mn-cs"/>
         </a:defRPr>
       </a:lvl6pPr>
-      <a:lvl7pPr marL="2971800" indent="-228600" algn="l" defTabSz="914400" rtl="0" eaLnBrk="1" latinLnBrk="1" hangingPunct="1">
+      <a:lvl7pPr marL="2971800" indent="-228600" algn="l" defTabSz="914400" rtl="0" eaLnBrk="1" latinLnBrk="0" hangingPunct="1">
         <a:spcBef>
           <a:spcPct val="20000"/>
         </a:spcBef>
@@ -3419,7 +3419,7 @@
           <a:cs typeface="+mn-cs"/>
         </a:defRPr>
       </a:lvl7pPr>
-      <a:lvl8pPr marL="3429000" indent="-228600" algn="l" defTabSz="914400" rtl="0" eaLnBrk="1" latinLnBrk="1" hangingPunct="1">
+      <a:lvl8pPr marL="3429000" indent="-228600" algn="l" defTabSz="914400" rtl="0" eaLnBrk="1" latinLnBrk="0" hangingPunct="1">
         <a:spcBef>
           <a:spcPct val="20000"/>
         </a:spcBef>
@@ -3434,7 +3434,7 @@
           <a:cs typeface="+mn-cs"/>
         </a:defRPr>
       </a:lvl8pPr>
-      <a:lvl9pPr marL="3886200" indent="-228600" algn="l" defTabSz="914400" rtl="0" eaLnBrk="1" latinLnBrk="1" hangingPunct="1">
+      <a:lvl9pPr marL="3886200" indent="-228600" algn="l" defTabSz="914400" rtl="0" eaLnBrk="1" latinLnBrk="0" hangingPunct="1">
         <a:spcBef>
           <a:spcPct val="20000"/>
         </a:spcBef>
@@ -3454,7 +3454,7 @@
       <a:defPPr>
         <a:defRPr lang="ko-KR"/>
       </a:defPPr>
-      <a:lvl1pPr marL="0" algn="l" defTabSz="914400" rtl="0" eaLnBrk="1" latinLnBrk="1" hangingPunct="1">
+      <a:lvl1pPr marL="0" algn="l" defTabSz="914400" rtl="0" eaLnBrk="1" latinLnBrk="0" hangingPunct="1">
         <a:defRPr sz="1800" kern="1200">
           <a:solidFill>
             <a:schemeClr val="tx1"/>
@@ -3464,7 +3464,7 @@
           <a:cs typeface="+mn-cs"/>
         </a:defRPr>
       </a:lvl1pPr>
-      <a:lvl2pPr marL="457200" algn="l" defTabSz="914400" rtl="0" eaLnBrk="1" latinLnBrk="1" hangingPunct="1">
+      <a:lvl2pPr marL="457200" algn="l" defTabSz="914400" rtl="0" eaLnBrk="1" latinLnBrk="0" hangingPunct="1">
         <a:defRPr sz="1800" kern="1200">
           <a:solidFill>
             <a:schemeClr val="tx1"/>
@@ -3474,7 +3474,7 @@
           <a:cs typeface="+mn-cs"/>
         </a:defRPr>
       </a:lvl2pPr>
-      <a:lvl3pPr marL="914400" algn="l" defTabSz="914400" rtl="0" eaLnBrk="1" latinLnBrk="1" hangingPunct="1">
+      <a:lvl3pPr marL="914400" algn="l" defTabSz="914400" rtl="0" eaLnBrk="1" latinLnBrk="0" hangingPunct="1">
         <a:defRPr sz="1800" kern="1200">
           <a:solidFill>
             <a:schemeClr val="tx1"/>
@@ -3484,7 +3484,7 @@
           <a:cs typeface="+mn-cs"/>
         </a:defRPr>
       </a:lvl3pPr>
-      <a:lvl4pPr marL="1371600" algn="l" defTabSz="914400" rtl="0" eaLnBrk="1" latinLnBrk="1" hangingPunct="1">
+      <a:lvl4pPr marL="1371600" algn="l" defTabSz="914400" rtl="0" eaLnBrk="1" latinLnBrk="0" hangingPunct="1">
         <a:defRPr sz="1800" kern="1200">
           <a:solidFill>
             <a:schemeClr val="tx1"/>
@@ -3494,7 +3494,7 @@
           <a:cs typeface="+mn-cs"/>
         </a:defRPr>
       </a:lvl4pPr>
-      <a:lvl5pPr marL="1828800" algn="l" defTabSz="914400" rtl="0" eaLnBrk="1" latinLnBrk="1" hangingPunct="1">
+      <a:lvl5pPr marL="1828800" algn="l" defTabSz="914400" rtl="0" eaLnBrk="1" latinLnBrk="0" hangingPunct="1">
         <a:defRPr sz="1800" kern="1200">
           <a:solidFill>
             <a:schemeClr val="tx1"/>
@@ -3504,7 +3504,7 @@
           <a:cs typeface="+mn-cs"/>
         </a:defRPr>
       </a:lvl5pPr>
-      <a:lvl6pPr marL="2286000" algn="l" defTabSz="914400" rtl="0" eaLnBrk="1" latinLnBrk="1" hangingPunct="1">
+      <a:lvl6pPr marL="2286000" algn="l" defTabSz="914400" rtl="0" eaLnBrk="1" latinLnBrk="0" hangingPunct="1">
         <a:defRPr sz="1800" kern="1200">
           <a:solidFill>
             <a:schemeClr val="tx1"/>
@@ -3514,7 +3514,7 @@
           <a:cs typeface="+mn-cs"/>
         </a:defRPr>
       </a:lvl6pPr>
-      <a:lvl7pPr marL="2743200" algn="l" defTabSz="914400" rtl="0" eaLnBrk="1" latinLnBrk="1" hangingPunct="1">
+      <a:lvl7pPr marL="2743200" algn="l" defTabSz="914400" rtl="0" eaLnBrk="1" latinLnBrk="0" hangingPunct="1">
         <a:defRPr sz="1800" kern="1200">
           <a:solidFill>
             <a:schemeClr val="tx1"/>
@@ -3524,7 +3524,7 @@
           <a:cs typeface="+mn-cs"/>
         </a:defRPr>
       </a:lvl7pPr>
-      <a:lvl8pPr marL="3200400" algn="l" defTabSz="914400" rtl="0" eaLnBrk="1" latinLnBrk="1" hangingPunct="1">
+      <a:lvl8pPr marL="3200400" algn="l" defTabSz="914400" rtl="0" eaLnBrk="1" latinLnBrk="0" hangingPunct="1">
         <a:defRPr sz="1800" kern="1200">
           <a:solidFill>
             <a:schemeClr val="tx1"/>
@@ -3534,7 +3534,7 @@
           <a:cs typeface="+mn-cs"/>
         </a:defRPr>
       </a:lvl8pPr>
-      <a:lvl9pPr marL="3657600" algn="l" defTabSz="914400" rtl="0" eaLnBrk="1" latinLnBrk="1" hangingPunct="1">
+      <a:lvl9pPr marL="3657600" algn="l" defTabSz="914400" rtl="0" eaLnBrk="1" latinLnBrk="0" hangingPunct="1">
         <a:defRPr sz="1800" kern="1200">
           <a:solidFill>
             <a:schemeClr val="tx1"/>
@@ -5847,7 +5847,7 @@
                 <a:latin typeface="맑은 고딕"/>
                 <a:ea typeface="맑은 고딕"/>
               </a:rPr>
-              <a:t>Craig Larman, 2004</a:t>
+              <a:t>[Larman 2004]</a:t>
             </a:r>
           </a:p>
         </p:txBody>
@@ -7704,7 +7704,7 @@
                 <a:latin typeface="맑은 고딕"/>
                 <a:ea typeface="맑은 고딕"/>
               </a:rPr>
-              <a:t>Jez Humble, 2010</a:t>
+              <a:t>[Humble]</a:t>
             </a:r>
           </a:p>
         </p:txBody>
@@ -9013,7 +9013,7 @@
                 <a:latin typeface="맑은 고딕"/>
                 <a:ea typeface="맑은 고딕"/>
               </a:rPr>
-              <a:t>Martin Fowler, 2024</a:t>
+              <a:t>[Fowler 2024]</a:t>
             </a:r>
           </a:p>
         </p:txBody>
@@ -10356,7 +10356,7 @@
                 <a:latin typeface="맑은 고딕"/>
                 <a:ea typeface="맑은 고딕"/>
               </a:rPr>
-              <a:t>(「18」)</a:t>
+              <a:t>(「18. 역추적」)</a:t>
             </a:r>
             <a:r>
               <a:rPr sz="1800" b="0">
@@ -11432,7 +11432,7 @@
                 <a:latin typeface="맑은 고딕"/>
                 <a:ea typeface="맑은 고딕"/>
               </a:rPr>
-              <a:t>Martin Fowler, 2011</a:t>
+              <a:t>[Fowler 2011]</a:t>
             </a:r>
           </a:p>
         </p:txBody>
@@ -13225,7 +13225,7 @@
                 <a:latin typeface="맑은 고딕"/>
                 <a:ea typeface="맑은 고딕"/>
               </a:rPr>
-              <a:t>Gene Kim, 2012</a:t>
+              <a:t>[Kim 2012]</a:t>
             </a:r>
           </a:p>
         </p:txBody>
@@ -14712,7 +14712,7 @@
                 <a:latin typeface="맑은 고딕"/>
                 <a:ea typeface="맑은 고딕"/>
               </a:rPr>
-              <a:t>Lean Enterprise Institute, www</a:t>
+              <a:t>[Lean Enterprise Institute]</a:t>
             </a:r>
           </a:p>
         </p:txBody>
@@ -16493,10 +16493,20 @@
                 <a:latin typeface="맑은 고딕"/>
                 <a:ea typeface="맑은 고딕"/>
               </a:rPr>
-              <a:t>(「09」)</a:t>
-            </a:r>
-            <a:r>
-              <a:rPr sz="1800" b="0">
+              <a:t>(「09. 초록 —</a:t>
+            </a:r>
+            <a:r>
+              <a:rPr sz="1200" b="0">
+                <a:solidFill>
+                  <a:srgbClr val="000000"/>
+                </a:solidFill>
+                <a:latin typeface="맑은 고딕"/>
+                <a:ea typeface="맑은 고딕"/>
+              </a:rPr>
+              <a:t> 가장 작은 수정」)</a:t>
+            </a:r>
+            <a:r>
+              <a:rPr sz="1600" b="0">
                 <a:solidFill>
                   <a:srgbClr val="000000"/>
                 </a:solidFill>
@@ -18631,7 +18641,7 @@
                 <a:latin typeface="맑은 고딕"/>
                 <a:ea typeface="맑은 고딕"/>
               </a:rPr>
-              <a:t>(「19」)</a:t>
+              <a:t>(「19. 원인 수준에서 고치기」)</a:t>
             </a:r>
             <a:r>
               <a:rPr sz="1600" b="0">
@@ -19025,7 +19035,7 @@
                 <a:latin typeface="맑은 고딕"/>
                 <a:ea typeface="맑은 고딕"/>
               </a:rPr>
-              <a:t>(「06」)</a:t>
+              <a:t>(「06. 개발자 테스트」)</a:t>
             </a:r>
             <a:r>
               <a:rPr sz="1600" b="0">
@@ -19379,7 +19389,7 @@
                 <a:latin typeface="맑은 고딕"/>
                 <a:ea typeface="맑은 고딕"/>
               </a:rPr>
-              <a:t>(「13」·「15」)</a:t>
+              <a:t>(「13. 지속적 통합」·「15. 지속적 배포」)</a:t>
             </a:r>
             <a:r>
               <a:rPr sz="1600" b="0">
@@ -23911,7 +23921,7 @@
                 <a:latin typeface="맑은 고딕"/>
                 <a:ea typeface="맑은 고딕"/>
               </a:rPr>
-              <a:t>Craig Larman, 2004</a:t>
+              <a:t>[Larman 2004]</a:t>
             </a:r>
           </a:p>
           <a:p>
@@ -24332,6 +24342,27 @@
             </a:r>
           </a:p>
           <a:p>
+            <a:pPr marL="342900" indent="0">
+              <a:spcBef>
+                <a:spcPts val="600"/>
+              </a:spcBef>
+              <a:spcAft>
+                <a:spcPts val="600"/>
+              </a:spcAft>
+              <a:buNone/>
+            </a:pPr>
+            <a:r>
+              <a:rPr sz="1800" b="1">
+                <a:solidFill>
+                  <a:srgbClr val="000000"/>
+                </a:solidFill>
+                <a:latin typeface="맑은 고딕"/>
+                <a:ea typeface="맑은 고딕"/>
+              </a:rPr>
+              <a:t>구현·검증·DevOps와 SW공학 피드백의 핵심</a:t>
+            </a:r>
+          </a:p>
+          <a:p>
             <a:pPr lvl="2" marL="723900" indent="-368300">
               <a:spcBef>
                 <a:spcPts val="600"/>
@@ -24344,6 +24375,16 @@
               <a:buChar char=""/>
             </a:pPr>
             <a:r>
+              <a:rPr sz="1800" b="1">
+                <a:solidFill>
+                  <a:srgbClr val="000000"/>
+                </a:solidFill>
+                <a:latin typeface="맑은 고딕"/>
+                <a:ea typeface="맑은 고딕"/>
+              </a:rPr>
+              <a:t>원칙</a:t>
+            </a:r>
+            <a:r>
               <a:rPr sz="1800" b="0">
                 <a:solidFill>
                   <a:srgbClr val="000000"/>
@@ -24351,30 +24392,7 @@
                 <a:latin typeface="맑은 고딕"/>
                 <a:ea typeface="맑은 고딕"/>
               </a:rPr>
-              <a:t>구현·검증·DevOps와 SW공학 피드백의 핵심</a:t>
-            </a:r>
-          </a:p>
-          <a:p>
-            <a:pPr lvl="3" marL="1077913" indent="-354013">
-              <a:spcBef>
-                <a:spcPts val="600"/>
-              </a:spcBef>
-              <a:spcAft>
-                <a:spcPts val="600"/>
-              </a:spcAft>
-              <a:buSzPct val="90000"/>
-              <a:buFont typeface="Wingdings" pitchFamily="2" charset="2"/>
-              <a:buChar char=""/>
-            </a:pPr>
-            <a:r>
-              <a:rPr sz="1600" b="1">
-                <a:solidFill>
-                  <a:srgbClr val="000000"/>
-                </a:solidFill>
-                <a:latin typeface="맑은 고딕"/>
-                <a:ea typeface="맑은 고딕"/>
-              </a:rPr>
-              <a:t>원칙</a:t>
+              <a:t> —</a:t>
             </a:r>
             <a:r>
               <a:rPr sz="1600" b="0">
@@ -24384,239 +24402,7 @@
                 <a:latin typeface="맑은 고딕"/>
                 <a:ea typeface="맑은 고딕"/>
               </a:rPr>
-              <a:t> —</a:t>
-            </a:r>
-            <a:r>
-              <a:rPr sz="1400" b="0">
-                <a:solidFill>
-                  <a:srgbClr val="000000"/>
-                </a:solidFill>
-                <a:latin typeface="맑은 고딕"/>
-                <a:ea typeface="맑은 고딕"/>
-              </a:rPr>
               <a:t> 발견 위치와 원인 수준은 다르다. DevOps는 그 feedback을 빠르게 되돌린다</a:t>
-            </a:r>
-          </a:p>
-          <a:p>
-            <a:pPr lvl="3" marL="1077913" indent="-354013">
-              <a:spcBef>
-                <a:spcPts val="600"/>
-              </a:spcBef>
-              <a:spcAft>
-                <a:spcPts val="600"/>
-              </a:spcAft>
-              <a:buSzPct val="90000"/>
-              <a:buFont typeface="Wingdings" pitchFamily="2" charset="2"/>
-              <a:buChar char=""/>
-            </a:pPr>
-            <a:r>
-              <a:rPr sz="1600" b="1">
-                <a:solidFill>
-                  <a:srgbClr val="000000"/>
-                </a:solidFill>
-                <a:latin typeface="맑은 고딕"/>
-                <a:ea typeface="맑은 고딕"/>
-              </a:rPr>
-              <a:t>TDD 주기</a:t>
-            </a:r>
-            <a:r>
-              <a:rPr sz="1600" b="0">
-                <a:solidFill>
-                  <a:srgbClr val="000000"/>
-                </a:solidFill>
-                <a:latin typeface="맑은 고딕"/>
-                <a:ea typeface="맑은 고딕"/>
-              </a:rPr>
-              <a:t> —</a:t>
-            </a:r>
-            <a:r>
-              <a:rPr sz="1400" b="0">
-                <a:solidFill>
-                  <a:srgbClr val="000000"/>
-                </a:solidFill>
-                <a:latin typeface="맑은 고딕"/>
-                <a:ea typeface="맑은 고딕"/>
-              </a:rPr>
-              <a:t> 빨강</a:t>
-            </a:r>
-            <a:r>
-              <a:rPr sz="1000" b="0">
-                <a:solidFill>
-                  <a:srgbClr val="000000"/>
-                </a:solidFill>
-                <a:latin typeface="맑은 고딕"/>
-                <a:ea typeface="맑은 고딕"/>
-              </a:rPr>
-              <a:t>(증상 재현)</a:t>
-            </a:r>
-            <a:r>
-              <a:rPr sz="1400" b="0">
-                <a:solidFill>
-                  <a:srgbClr val="000000"/>
-                </a:solidFill>
-                <a:latin typeface="맑은 고딕"/>
-                <a:ea typeface="맑은 고딕"/>
-              </a:rPr>
-              <a:t>, 초록</a:t>
-            </a:r>
-            <a:r>
-              <a:rPr sz="1000" b="0">
-                <a:solidFill>
-                  <a:srgbClr val="000000"/>
-                </a:solidFill>
-                <a:latin typeface="맑은 고딕"/>
-                <a:ea typeface="맑은 고딕"/>
-              </a:rPr>
-              <a:t>(가장 작은 수정)</a:t>
-            </a:r>
-            <a:r>
-              <a:rPr sz="1400" b="0">
-                <a:solidFill>
-                  <a:srgbClr val="000000"/>
-                </a:solidFill>
-                <a:latin typeface="맑은 고딕"/>
-                <a:ea typeface="맑은 고딕"/>
-              </a:rPr>
-              <a:t>, 리팩터링</a:t>
-            </a:r>
-            <a:r>
-              <a:rPr sz="1000" b="0">
-                <a:solidFill>
-                  <a:srgbClr val="000000"/>
-                </a:solidFill>
-                <a:latin typeface="맑은 고딕"/>
-                <a:ea typeface="맑은 고딕"/>
-              </a:rPr>
-              <a:t>(같은 기대값으로 구조만)</a:t>
-            </a:r>
-          </a:p>
-          <a:p>
-            <a:pPr lvl="3" marL="1077913" indent="-354013">
-              <a:spcBef>
-                <a:spcPts val="600"/>
-              </a:spcBef>
-              <a:spcAft>
-                <a:spcPts val="600"/>
-              </a:spcAft>
-              <a:buSzPct val="90000"/>
-              <a:buFont typeface="Wingdings" pitchFamily="2" charset="2"/>
-              <a:buChar char=""/>
-            </a:pPr>
-            <a:r>
-              <a:rPr sz="1600" b="1">
-                <a:solidFill>
-                  <a:srgbClr val="000000"/>
-                </a:solidFill>
-                <a:latin typeface="맑은 고딕"/>
-                <a:ea typeface="맑은 고딕"/>
-              </a:rPr>
-              <a:t>파이프라인</a:t>
-            </a:r>
-            <a:r>
-              <a:rPr sz="1600" b="0">
-                <a:solidFill>
-                  <a:srgbClr val="000000"/>
-                </a:solidFill>
-                <a:latin typeface="맑은 고딕"/>
-                <a:ea typeface="맑은 고딕"/>
-              </a:rPr>
-              <a:t> —</a:t>
-            </a:r>
-            <a:r>
-              <a:rPr sz="1400" b="0">
-                <a:solidFill>
-                  <a:srgbClr val="000000"/>
-                </a:solidFill>
-                <a:latin typeface="맑은 고딕"/>
-                <a:ea typeface="맑은 고딕"/>
-              </a:rPr>
-              <a:t> IDE·pre-commit·CI·CD·운영. 같은 문제는 가장 이른 층에서 잡는다</a:t>
-            </a:r>
-          </a:p>
-          <a:p>
-            <a:pPr lvl="3" marL="1077913" indent="-354013">
-              <a:spcBef>
-                <a:spcPts val="600"/>
-              </a:spcBef>
-              <a:spcAft>
-                <a:spcPts val="600"/>
-              </a:spcAft>
-              <a:buSzPct val="90000"/>
-              <a:buFont typeface="Wingdings" pitchFamily="2" charset="2"/>
-              <a:buChar char=""/>
-            </a:pPr>
-            <a:r>
-              <a:rPr sz="1600" b="1">
-                <a:solidFill>
-                  <a:srgbClr val="000000"/>
-                </a:solidFill>
-                <a:latin typeface="맑은 고딕"/>
-                <a:ea typeface="맑은 고딕"/>
-              </a:rPr>
-              <a:t>역추적</a:t>
-            </a:r>
-            <a:r>
-              <a:rPr sz="1600" b="0">
-                <a:solidFill>
-                  <a:srgbClr val="000000"/>
-                </a:solidFill>
-                <a:latin typeface="맑은 고딕"/>
-                <a:ea typeface="맑은 고딕"/>
-              </a:rPr>
-              <a:t> —</a:t>
-            </a:r>
-            <a:r>
-              <a:rPr sz="1400" b="0">
-                <a:solidFill>
-                  <a:srgbClr val="000000"/>
-                </a:solidFill>
-                <a:latin typeface="맑은 고딕"/>
-                <a:ea typeface="맑은 고딕"/>
-              </a:rPr>
-              <a:t> 다섯 번의 왜로 원인 수준을 찾고, 그 수준부터 아래로 고친다</a:t>
-            </a:r>
-          </a:p>
-          <a:p>
-            <a:pPr lvl="3" marL="1077913" indent="-354013">
-              <a:spcBef>
-                <a:spcPts val="600"/>
-              </a:spcBef>
-              <a:spcAft>
-                <a:spcPts val="600"/>
-              </a:spcAft>
-              <a:buSzPct val="90000"/>
-              <a:buFont typeface="Wingdings" pitchFamily="2" charset="2"/>
-              <a:buChar char=""/>
-            </a:pPr>
-            <a:r>
-              <a:rPr sz="1600" b="1">
-                <a:solidFill>
-                  <a:srgbClr val="000000"/>
-                </a:solidFill>
-                <a:latin typeface="맑은 고딕"/>
-                <a:ea typeface="맑은 고딕"/>
-              </a:rPr>
-              <a:t>잘못된 관행</a:t>
-            </a:r>
-            <a:r>
-              <a:rPr sz="1600" b="0">
-                <a:solidFill>
-                  <a:srgbClr val="000000"/>
-                </a:solidFill>
-                <a:latin typeface="맑은 고딕"/>
-                <a:ea typeface="맑은 고딕"/>
-              </a:rPr>
-              <a:t> —</a:t>
-            </a:r>
-            <a:r>
-              <a:rPr sz="1400" b="0">
-                <a:solidFill>
-                  <a:srgbClr val="000000"/>
-                </a:solidFill>
-                <a:latin typeface="맑은 고딕"/>
-                <a:ea typeface="맑은 고딕"/>
-              </a:rPr>
-              <a:t> 증상 위치에서 고치기, 테스트를 코드에 맞추기, 느린 feedback</a:t>
             </a:r>
           </a:p>
           <a:p>
@@ -24632,6 +24418,16 @@
               <a:buChar char=""/>
             </a:pPr>
             <a:r>
+              <a:rPr sz="1800" b="1">
+                <a:solidFill>
+                  <a:srgbClr val="000000"/>
+                </a:solidFill>
+                <a:latin typeface="맑은 고딕"/>
+                <a:ea typeface="맑은 고딕"/>
+              </a:rPr>
+              <a:t>TDD 주기</a:t>
+            </a:r>
+            <a:r>
               <a:rPr sz="1800" b="0">
                 <a:solidFill>
                   <a:srgbClr val="000000"/>
@@ -24639,11 +24435,71 @@
                 <a:latin typeface="맑은 고딕"/>
                 <a:ea typeface="맑은 고딕"/>
               </a:rPr>
-              <a:t>다음 세션</a:t>
-            </a:r>
-          </a:p>
-          <a:p>
-            <a:pPr lvl="3" marL="1077913" indent="-354013">
+              <a:t> —</a:t>
+            </a:r>
+            <a:r>
+              <a:rPr sz="1600" b="0">
+                <a:solidFill>
+                  <a:srgbClr val="000000"/>
+                </a:solidFill>
+                <a:latin typeface="맑은 고딕"/>
+                <a:ea typeface="맑은 고딕"/>
+              </a:rPr>
+              <a:t> 빨강</a:t>
+            </a:r>
+            <a:r>
+              <a:rPr sz="1200" b="0">
+                <a:solidFill>
+                  <a:srgbClr val="000000"/>
+                </a:solidFill>
+                <a:latin typeface="맑은 고딕"/>
+                <a:ea typeface="맑은 고딕"/>
+              </a:rPr>
+              <a:t>(증상 재현)</a:t>
+            </a:r>
+            <a:r>
+              <a:rPr sz="1600" b="0">
+                <a:solidFill>
+                  <a:srgbClr val="000000"/>
+                </a:solidFill>
+                <a:latin typeface="맑은 고딕"/>
+                <a:ea typeface="맑은 고딕"/>
+              </a:rPr>
+              <a:t>, 초록</a:t>
+            </a:r>
+            <a:r>
+              <a:rPr sz="1200" b="0">
+                <a:solidFill>
+                  <a:srgbClr val="000000"/>
+                </a:solidFill>
+                <a:latin typeface="맑은 고딕"/>
+                <a:ea typeface="맑은 고딕"/>
+              </a:rPr>
+              <a:t>(가장 작은 수정)</a:t>
+            </a:r>
+            <a:r>
+              <a:rPr sz="1600" b="0">
+                <a:solidFill>
+                  <a:srgbClr val="000000"/>
+                </a:solidFill>
+                <a:latin typeface="맑은 고딕"/>
+                <a:ea typeface="맑은 고딕"/>
+              </a:rPr>
+              <a:t>, 리팩터링</a:t>
+            </a:r>
+            <a:r>
+              <a:rPr sz="1200" b="0">
+                <a:solidFill>
+                  <a:srgbClr val="000000"/>
+                </a:solidFill>
+                <a:latin typeface="맑은 고딕"/>
+                <a:ea typeface="맑은 고딕"/>
+              </a:rPr>
+              <a:t>(같은 기대값으로 구조만)</a:t>
+            </a:r>
+          </a:p>
+          <a:p>
+            <a:pPr lvl="2" marL="723900" indent="-368300">
               <a:spcBef>
                 <a:spcPts val="600"/>
               </a:spcBef>
@@ -24652,9 +24508,29 @@
               </a:spcAft>
               <a:buSzPct val="90000"/>
               <a:buFont typeface="Wingdings" pitchFamily="2" charset="2"/>
-              <a:buChar char=""/>
+              <a:buChar char=""/>
             </a:pPr>
             <a:r>
+              <a:rPr sz="1800" b="1">
+                <a:solidFill>
+                  <a:srgbClr val="000000"/>
+                </a:solidFill>
+                <a:latin typeface="맑은 고딕"/>
+                <a:ea typeface="맑은 고딕"/>
+              </a:rPr>
+              <a:t>파이프라인</a:t>
+            </a:r>
+            <a:r>
+              <a:rPr sz="1800" b="0">
+                <a:solidFill>
+                  <a:srgbClr val="000000"/>
+                </a:solidFill>
+                <a:latin typeface="맑은 고딕"/>
+                <a:ea typeface="맑은 고딕"/>
+              </a:rPr>
+              <a:t> —</a:t>
+            </a:r>
+            <a:r>
               <a:rPr sz="1600" b="0">
                 <a:solidFill>
                   <a:srgbClr val="000000"/>
@@ -24662,9 +24538,149 @@
                 <a:latin typeface="맑은 고딕"/>
                 <a:ea typeface="맑은 고딕"/>
               </a:rPr>
+              <a:t> IDE·pre-commit·CI·CD·운영. 같은 문제는 가장 이른 층에서 잡는다</a:t>
+            </a:r>
+          </a:p>
+          <a:p>
+            <a:pPr lvl="2" marL="723900" indent="-368300">
+              <a:spcBef>
+                <a:spcPts val="600"/>
+              </a:spcBef>
+              <a:spcAft>
+                <a:spcPts val="600"/>
+              </a:spcAft>
+              <a:buSzPct val="90000"/>
+              <a:buFont typeface="Wingdings" pitchFamily="2" charset="2"/>
+              <a:buChar char=""/>
+            </a:pPr>
+            <a:r>
+              <a:rPr sz="1800" b="1">
+                <a:solidFill>
+                  <a:srgbClr val="000000"/>
+                </a:solidFill>
+                <a:latin typeface="맑은 고딕"/>
+                <a:ea typeface="맑은 고딕"/>
+              </a:rPr>
+              <a:t>역추적</a:t>
+            </a:r>
+            <a:r>
+              <a:rPr sz="1800" b="0">
+                <a:solidFill>
+                  <a:srgbClr val="000000"/>
+                </a:solidFill>
+                <a:latin typeface="맑은 고딕"/>
+                <a:ea typeface="맑은 고딕"/>
+              </a:rPr>
+              <a:t> —</a:t>
+            </a:r>
+            <a:r>
+              <a:rPr sz="1600" b="0">
+                <a:solidFill>
+                  <a:srgbClr val="000000"/>
+                </a:solidFill>
+                <a:latin typeface="맑은 고딕"/>
+                <a:ea typeface="맑은 고딕"/>
+              </a:rPr>
+              <a:t> 다섯 번의 왜로 원인 수준을 찾고, 그 수준부터 아래로 고친다</a:t>
+            </a:r>
+          </a:p>
+          <a:p>
+            <a:pPr lvl="2" marL="723900" indent="-368300">
+              <a:spcBef>
+                <a:spcPts val="600"/>
+              </a:spcBef>
+              <a:spcAft>
+                <a:spcPts val="600"/>
+              </a:spcAft>
+              <a:buSzPct val="90000"/>
+              <a:buFont typeface="Wingdings" pitchFamily="2" charset="2"/>
+              <a:buChar char=""/>
+            </a:pPr>
+            <a:r>
+              <a:rPr sz="1800" b="1">
+                <a:solidFill>
+                  <a:srgbClr val="000000"/>
+                </a:solidFill>
+                <a:latin typeface="맑은 고딕"/>
+                <a:ea typeface="맑은 고딕"/>
+              </a:rPr>
+              <a:t>잘못된 관행</a:t>
+            </a:r>
+            <a:r>
+              <a:rPr sz="1800" b="0">
+                <a:solidFill>
+                  <a:srgbClr val="000000"/>
+                </a:solidFill>
+                <a:latin typeface="맑은 고딕"/>
+                <a:ea typeface="맑은 고딕"/>
+              </a:rPr>
+              <a:t> —</a:t>
+            </a:r>
+            <a:r>
+              <a:rPr sz="1600" b="0">
+                <a:solidFill>
+                  <a:srgbClr val="000000"/>
+                </a:solidFill>
+                <a:latin typeface="맑은 고딕"/>
+                <a:ea typeface="맑은 고딕"/>
+              </a:rPr>
+              <a:t> 증상 위치에서 고치기, 테스트를 코드에 맞추기, 느린 feedback</a:t>
+            </a:r>
+          </a:p>
+          <a:p>
+            <a:pPr marL="342900" indent="0">
+              <a:spcBef>
+                <a:spcPts val="600"/>
+              </a:spcBef>
+              <a:spcAft>
+                <a:spcPts val="600"/>
+              </a:spcAft>
+              <a:buNone/>
+            </a:pPr>
+            <a:r>
+              <a:rPr sz="1800" b="1">
+                <a:solidFill>
+                  <a:srgbClr val="000000"/>
+                </a:solidFill>
+                <a:latin typeface="맑은 고딕"/>
+                <a:ea typeface="맑은 고딕"/>
+              </a:rPr>
+              <a:t>다음 세션</a:t>
+            </a:r>
+          </a:p>
+          <a:p>
+            <a:pPr lvl="2" marL="723900" indent="-368300">
+              <a:spcBef>
+                <a:spcPts val="600"/>
+              </a:spcBef>
+              <a:spcAft>
+                <a:spcPts val="600"/>
+              </a:spcAft>
+              <a:buSzPct val="90000"/>
+              <a:buFont typeface="Wingdings" pitchFamily="2" charset="2"/>
+              <a:buChar char=""/>
+            </a:pPr>
+            <a:r>
+              <a:rPr sz="1800" b="0">
+                <a:solidFill>
+                  <a:srgbClr val="000000"/>
+                </a:solidFill>
+                <a:latin typeface="맑은 고딕"/>
+                <a:ea typeface="맑은 고딕"/>
+              </a:rPr>
               <a:t>"</a:t>
             </a:r>
             <a:r>
+              <a:rPr sz="1800" b="1">
+                <a:solidFill>
+                  <a:srgbClr val="000000"/>
+                </a:solidFill>
+                <a:latin typeface="맑은 고딕"/>
+                <a:ea typeface="맑은 고딕"/>
+              </a:rPr>
+              <a:t>13. OOAD에서 전문영역으로 —</a:t>
+            </a:r>
+            <a:r>
               <a:rPr sz="1600" b="1">
                 <a:solidFill>
                   <a:srgbClr val="000000"/>
@@ -24672,20 +24688,10 @@
                 <a:latin typeface="맑은 고딕"/>
                 <a:ea typeface="맑은 고딕"/>
               </a:rPr>
-              <a:t>13. OOAD에서 전문영역으로 —</a:t>
-            </a:r>
-            <a:r>
-              <a:rPr sz="1400" b="1">
-                <a:solidFill>
-                  <a:srgbClr val="000000"/>
-                </a:solidFill>
-                <a:latin typeface="맑은 고딕"/>
-                <a:ea typeface="맑은 고딕"/>
-              </a:rPr>
               <a:t> Architecture · DDD · MSA</a:t>
             </a:r>
             <a:r>
-              <a:rPr sz="1400" b="0">
+              <a:rPr sz="1600" b="0">
                 <a:solidFill>
                   <a:srgbClr val="000000"/>
                 </a:solidFill>
@@ -29138,7 +29144,7 @@
                 <a:latin typeface="맑은 고딕"/>
                 <a:ea typeface="맑은 고딕"/>
               </a:rPr>
-              <a:t>Edsger W. Dijkstra, 1970</a:t>
+              <a:t>[Dijkstra]</a:t>
             </a:r>
           </a:p>
         </p:txBody>
@@ -30321,7 +30327,7 @@
                 <a:latin typeface="맑은 고딕"/>
                 <a:ea typeface="맑은 고딕"/>
               </a:rPr>
-              <a:t>Craig Larman, 2004</a:t>
+              <a:t>[Larman 2004]</a:t>
             </a:r>
           </a:p>
         </p:txBody>

--- a/courses/ooad/sessions/s12.pptx
+++ b/courses/ooad/sessions/s12.pptx
@@ -4013,6 +4013,48 @@
               <a:t>15. 지속적 배포</a:t>
             </a:r>
           </a:p>
+          <a:p>
+            <a:pPr lvl="1" marL="355600" indent="0">
+              <a:spcBef>
+                <a:spcPts val="300"/>
+              </a:spcBef>
+              <a:spcAft>
+                <a:spcPts val="300"/>
+              </a:spcAft>
+              <a:buNone/>
+            </a:pPr>
+            <a:r>
+              <a:rPr sz="1600" b="0">
+                <a:solidFill>
+                  <a:srgbClr val="000000"/>
+                </a:solidFill>
+                <a:latin typeface="맑은 고딕"/>
+                <a:ea typeface="맑은 고딕"/>
+              </a:rPr>
+              <a:t>16. 운영 feedback</a:t>
+            </a:r>
+          </a:p>
+          <a:p>
+            <a:pPr lvl="1" marL="355600" indent="0">
+              <a:spcBef>
+                <a:spcPts val="300"/>
+              </a:spcBef>
+              <a:spcAft>
+                <a:spcPts val="300"/>
+              </a:spcAft>
+              <a:buNone/>
+            </a:pPr>
+            <a:r>
+              <a:rPr sz="1600" b="0">
+                <a:solidFill>
+                  <a:srgbClr val="000000"/>
+                </a:solidFill>
+                <a:latin typeface="맑은 고딕"/>
+                <a:ea typeface="맑은 고딕"/>
+              </a:rPr>
+              <a:t>17. DevOps의 되먹임</a:t>
+            </a:r>
+          </a:p>
         </p:txBody>
       </p:sp>
       <p:sp>
@@ -4117,48 +4159,6 @@
             <a:normAutofit/>
           </a:bodyPr>
           <a:lstStyle/>
-          <a:p>
-            <a:pPr lvl="1" marL="355600" indent="0">
-              <a:spcBef>
-                <a:spcPts val="300"/>
-              </a:spcBef>
-              <a:spcAft>
-                <a:spcPts val="300"/>
-              </a:spcAft>
-              <a:buNone/>
-            </a:pPr>
-            <a:r>
-              <a:rPr sz="1600" b="0">
-                <a:solidFill>
-                  <a:srgbClr val="000000"/>
-                </a:solidFill>
-                <a:latin typeface="맑은 고딕"/>
-                <a:ea typeface="맑은 고딕"/>
-              </a:rPr>
-              <a:t>16. 운영 feedback</a:t>
-            </a:r>
-          </a:p>
-          <a:p>
-            <a:pPr lvl="1" marL="355600" indent="0">
-              <a:spcBef>
-                <a:spcPts val="300"/>
-              </a:spcBef>
-              <a:spcAft>
-                <a:spcPts val="300"/>
-              </a:spcAft>
-              <a:buNone/>
-            </a:pPr>
-            <a:r>
-              <a:rPr sz="1600" b="0">
-                <a:solidFill>
-                  <a:srgbClr val="000000"/>
-                </a:solidFill>
-                <a:latin typeface="맑은 고딕"/>
-                <a:ea typeface="맑은 고딕"/>
-              </a:rPr>
-              <a:t>17. DevOps의 되먹임</a:t>
-            </a:r>
-          </a:p>
           <a:p>
             <a:pPr lvl="1" marL="355600" indent="0">
               <a:spcBef>
@@ -16986,7 +16986,7 @@
         </p:blipFill>
         <p:spPr>
           <a:xfrm>
-            <a:off x="3661019" y="3043203"/>
+            <a:off x="3661019" y="3043202"/>
             <a:ext cx="1821962" cy="2413000"/>
           </a:xfrm>
           <a:prstGeom prst="rect">
@@ -19626,7 +19626,7 @@
         <p:spPr>
           <a:xfrm>
             <a:off x="365760" y="960120"/>
-            <a:ext cx="8622792" cy="5522976"/>
+            <a:ext cx="8622792" cy="5352345"/>
           </a:xfrm>
         </p:spPr>
         <p:txBody>
@@ -23023,7 +23023,7 @@
         <p:spPr>
           <a:xfrm>
             <a:off x="233172" y="1414318"/>
-            <a:ext cx="4338828" cy="5068778"/>
+            <a:ext cx="4338828" cy="4898147"/>
           </a:xfrm>
         </p:spPr>
         <p:txBody>
@@ -23360,7 +23360,7 @@
         <p:spPr>
           <a:xfrm>
             <a:off x="4572000" y="1414318"/>
-            <a:ext cx="4439412" cy="5068778"/>
+            <a:ext cx="4439412" cy="4898147"/>
           </a:xfrm>
         </p:spPr>
         <p:txBody>

--- a/courses/ooad/sessions/s12.pptx
+++ b/courses/ooad/sessions/s12.pptx
@@ -1756,14 +1756,7 @@
             <a:pPr lvl="0"/>
             <a:r>
               <a:rPr lang="ko-KR" sz="1200"/>
-              <a:t>요구가 맞았다는 것을 확인하는 것도 역추적의 결과다. 모든 증상의 원인이 요구는 아니다.</a:t>
-            </a:r>
-          </a:p>
-          <a:p>
-            <a:pPr lvl="0"/>
-            <a:r>
-              <a:rPr lang="ko-KR" sz="1200"/>
-              <a:t>고객 문의가 생긴 이유는 해지 확인 화면이 "남은 회차가 취소된다"고만 안내했기 때문이다. 안내 문구는 유스케이스 1c의 결과 설명으로 되돌린다.</a:t>
+              <a:t>이 세션의 역추적은 요구·분석·설계까지 올라갔다. 다음 세션은 아키텍처·도메인 설계·분산 시스템에서 이 판단들이 어떻게 더 깊어지는지 본다.</a:t>
             </a:r>
           </a:p>
         </p:txBody>
@@ -1824,7 +1817,14 @@
             <a:pPr lvl="0"/>
             <a:r>
               <a:rPr lang="ko-KR" sz="1200"/>
-              <a:t>운영 지표는 수정이 효과가 있었는지 확인하는 feedback이다. 0이 목표가 아니다 — 24시간 규칙에 따라 배송되는 회차는 정상이다.</a:t>
+              <a:t>요구가 맞았다는 것을 확인하는 것도 역추적의 결과다. 모든 증상의 원인이 요구는 아니다.</a:t>
+            </a:r>
+          </a:p>
+          <a:p>
+            <a:pPr lvl="0"/>
+            <a:r>
+              <a:rPr lang="ko-KR" sz="1200"/>
+              <a:t>고객 문의가 생긴 이유는 해지 확인 화면이 "남은 회차가 취소된다"고만 안내했기 때문이다. 안내 문구는 유스케이스 1c의 결과 설명으로 되돌린다.</a:t>
             </a:r>
           </a:p>
         </p:txBody>
@@ -1885,7 +1885,7 @@
             <a:pPr lvl="0"/>
             <a:r>
               <a:rPr lang="ko-KR" sz="1200"/>
-              <a:t>회차 상태 RoundStatus의 새 영문 값 — DELIVERY_REQUESTED. 앞의 다섯 값(SCHEDULED, BILLED, DELIVERED, REFUND_PENDING, CANCELLED)에 더한다.</a:t>
+              <a:t>운영 지표는 수정이 효과가 있었는지 확인하는 feedback이다. 0이 목표가 아니다 — 24시간 규칙에 따라 배송되는 회차는 정상이다.</a:t>
             </a:r>
           </a:p>
         </p:txBody>
@@ -2014,7 +2014,7 @@
             <a:pPr lvl="0"/>
             <a:r>
               <a:rPr lang="ko-KR" sz="1200"/>
-              <a:t>이 세션의 역추적은 요구·분석·설계까지 올라갔다. 다음 세션은 아키텍처·도메인 설계·분산 시스템에서 이 판단들이 어떻게 더 깊어지는지 본다.</a:t>
+              <a:t>회차 상태 RoundStatus의 새 영문 값 — DELIVERY_REQUESTED. 앞의 다섯 값(SCHEDULED, BILLED, DELIVERED, REFUND_PENDING, CANCELLED)에 더한다.</a:t>
             </a:r>
           </a:p>
         </p:txBody>
@@ -4385,100 +4385,7 @@
                 <a:latin typeface="맑은 고딕"/>
                 <a:ea typeface="맑은 고딕"/>
               </a:rPr>
-              <a:t>26. 역추적 </a:t>
-            </a:r>
-            <a:r>
-              <a:rPr sz="1200" b="0">
-                <a:solidFill>
-                  <a:srgbClr val="000000"/>
-                </a:solidFill>
-                <a:latin typeface="맑은 고딕"/>
-                <a:ea typeface="맑은 고딕"/>
-              </a:rPr>
-              <a:t>(안)</a:t>
-            </a:r>
-          </a:p>
-          <a:p>
-            <a:pPr lvl="1" marL="355600" indent="0">
-              <a:spcBef>
-                <a:spcPts val="300"/>
-              </a:spcBef>
-              <a:spcAft>
-                <a:spcPts val="300"/>
-              </a:spcAft>
-              <a:buNone/>
-            </a:pPr>
-            <a:r>
-              <a:rPr sz="1600" b="0">
-                <a:solidFill>
-                  <a:srgbClr val="000000"/>
-                </a:solidFill>
-                <a:latin typeface="맑은 고딕"/>
-                <a:ea typeface="맑은 고딕"/>
-              </a:rPr>
-              <a:t>27. feedback 배치 </a:t>
-            </a:r>
-            <a:r>
-              <a:rPr sz="1200" b="0">
-                <a:solidFill>
-                  <a:srgbClr val="000000"/>
-                </a:solidFill>
-                <a:latin typeface="맑은 고딕"/>
-                <a:ea typeface="맑은 고딕"/>
-              </a:rPr>
-              <a:t>(안)</a:t>
-            </a:r>
-          </a:p>
-          <a:p>
-            <a:pPr lvl="1" marL="355600" indent="0">
-              <a:spcBef>
-                <a:spcPts val="300"/>
-              </a:spcBef>
-              <a:spcAft>
-                <a:spcPts val="300"/>
-              </a:spcAft>
-              <a:buNone/>
-            </a:pPr>
-            <a:r>
-              <a:rPr sz="1600" b="0">
-                <a:solidFill>
-                  <a:srgbClr val="000000"/>
-                </a:solidFill>
-                <a:latin typeface="맑은 고딕"/>
-                <a:ea typeface="맑은 고딕"/>
-              </a:rPr>
-              <a:t>28. 피드백 보완 </a:t>
-            </a:r>
-            <a:r>
-              <a:rPr sz="1200" b="0">
-                <a:solidFill>
-                  <a:srgbClr val="000000"/>
-                </a:solidFill>
-                <a:latin typeface="맑은 고딕"/>
-                <a:ea typeface="맑은 고딕"/>
-              </a:rPr>
-              <a:t>(안)</a:t>
-            </a:r>
-          </a:p>
-          <a:p>
-            <a:pPr lvl="1" marL="355600" indent="0">
-              <a:spcBef>
-                <a:spcPts val="300"/>
-              </a:spcBef>
-              <a:spcAft>
-                <a:spcPts val="300"/>
-              </a:spcAft>
-              <a:buNone/>
-            </a:pPr>
-            <a:r>
-              <a:rPr sz="1600" b="0">
-                <a:solidFill>
-                  <a:srgbClr val="000000"/>
-                </a:solidFill>
-                <a:latin typeface="맑은 고딕"/>
-                <a:ea typeface="맑은 고딕"/>
-              </a:rPr>
-              <a:t>29. 요약</a:t>
+              <a:t>26. 요약</a:t>
             </a:r>
           </a:p>
         </p:txBody>
@@ -5827,7 +5734,7 @@
                 <a:latin typeface="맑은 고딕"/>
                 <a:ea typeface="맑은 고딕"/>
               </a:rPr>
-              <a:t>"Refactoring is a structured, disciplined method to rewrite or restructure existing code without changing its external behavior"</a:t>
+              <a:t>"Refactoring … is a structured, disciplined method to rewrite or restructure existing code without changing its external behavior"</a:t>
             </a:r>
             <a:r>
               <a:rPr sz="1000" b="0">
@@ -19863,7 +19770,7 @@
               <a:t>를 적용해 원인 수준</a:t>
             </a:r>
             <a:r>
-              <a:rPr sz="1000" b="0">
+              <a:rPr sz="1200" b="0">
                 <a:solidFill>
                   <a:srgbClr val="000000"/>
                 </a:solidFill>
@@ -19914,7 +19821,7 @@
               <a:t>더 이른 층</a:t>
             </a:r>
             <a:r>
-              <a:rPr sz="1000" b="0">
+              <a:rPr sz="1200" b="0">
                 <a:solidFill>
                   <a:srgbClr val="000000"/>
                 </a:solidFill>
@@ -19998,7 +19905,7 @@
               <a:t> —</a:t>
             </a:r>
             <a:r>
-              <a:rPr sz="1050" b="0">
+              <a:rPr sz="1400" b="0">
                 <a:solidFill>
                   <a:srgbClr val="000000"/>
                 </a:solidFill>
@@ -20049,7 +19956,7 @@
               <a:t> —</a:t>
             </a:r>
             <a:r>
-              <a:rPr sz="1050" b="0">
+              <a:rPr sz="1400" b="0">
                 <a:solidFill>
                   <a:srgbClr val="000000"/>
                 </a:solidFill>
@@ -20059,7 +19966,7 @@
               <a:t> 각 "왜"의 답이 산출물</a:t>
             </a:r>
             <a:r>
-              <a:rPr sz="850" b="0">
+              <a:rPr sz="1200" b="0">
                 <a:solidFill>
                   <a:srgbClr val="000000"/>
                 </a:solidFill>
@@ -20069,7 +19976,7 @@
               <a:t>(유스케이스·상태 기계·계약)</a:t>
             </a:r>
             <a:r>
-              <a:rPr sz="1050" b="0">
+              <a:rPr sz="1400" b="0">
                 <a:solidFill>
                   <a:srgbClr val="000000"/>
                 </a:solidFill>
@@ -20120,7 +20027,7 @@
               <a:t> —</a:t>
             </a:r>
             <a:r>
-              <a:rPr sz="1050" b="0">
+              <a:rPr sz="1400" b="0">
                 <a:solidFill>
                   <a:srgbClr val="000000"/>
                 </a:solidFill>
@@ -20171,7 +20078,7 @@
               <a:t> —</a:t>
             </a:r>
             <a:r>
-              <a:rPr sz="1050" b="0">
+              <a:rPr sz="1400" b="0">
                 <a:solidFill>
                   <a:srgbClr val="000000"/>
                 </a:solidFill>
@@ -20222,7 +20129,7 @@
               <a:t> —</a:t>
             </a:r>
             <a:r>
-              <a:rPr sz="1050" b="0">
+              <a:rPr sz="1400" b="0">
                 <a:solidFill>
                   <a:srgbClr val="000000"/>
                 </a:solidFill>
@@ -20265,7 +20172,7 @@
               <a:t> —</a:t>
             </a:r>
             <a:r>
-              <a:rPr sz="1050" b="0">
+              <a:rPr sz="1600" b="0">
                 <a:solidFill>
                   <a:srgbClr val="000000"/>
                 </a:solidFill>
@@ -20291,6 +20198,614 @@
 </file>
 
 <file path=ppt/slides/slide27.xml><?xml version="1.0" encoding="utf-8"?>
+<p:sld xmlns:a="http://schemas.openxmlformats.org/drawingml/2006/main" xmlns:r="http://schemas.openxmlformats.org/officeDocument/2006/relationships" xmlns:p="http://schemas.openxmlformats.org/presentationml/2006/main">
+  <p:cSld>
+    <p:spTree>
+      <p:nvGrpSpPr>
+        <p:cNvPr id="1" name="">
+          <a:extLst>
+            <a:ext uri="{FF2B5EF4-FFF2-40B4-BE49-F238E27FC236}">
+              <a16:creationId xmlns:a16="http://schemas.microsoft.com/office/drawing/2014/main" id="{8E4F1F13-426B-086B-7D8C-9A58A0F879DB}"/>
+            </a:ext>
+          </a:extLst>
+        </p:cNvPr>
+        <p:cNvGrpSpPr/>
+        <p:nvPr/>
+      </p:nvGrpSpPr>
+      <p:grpSpPr>
+        <a:xfrm>
+          <a:off x="0" y="0"/>
+          <a:ext cx="0" cy="0"/>
+          <a:chOff x="0" y="0"/>
+          <a:chExt cx="0" cy="0"/>
+        </a:xfrm>
+      </p:grpSpPr>
+      <p:sp>
+        <p:nvSpPr>
+          <p:cNvPr id="2" name="제목 1">
+            <a:extLst>
+              <a:ext uri="{FF2B5EF4-FFF2-40B4-BE49-F238E27FC236}">
+                <a16:creationId xmlns:a16="http://schemas.microsoft.com/office/drawing/2014/main" id="{AA26A92D-924E-0575-9551-F8FD7BFD3FAD}"/>
+              </a:ext>
+            </a:extLst>
+          </p:cNvPr>
+          <p:cNvSpPr>
+            <a:spLocks noGrp="1"/>
+          </p:cNvSpPr>
+          <p:nvPr>
+            <p:ph type="title"/>
+          </p:nvPr>
+        </p:nvSpPr>
+        <p:spPr/>
+        <p:txBody>
+          <a:bodyPr/>
+          <a:lstStyle/>
+          <a:p>
+            <a:r>
+              <a:rPr sz="2400" b="1">
+                <a:solidFill>
+                  <a:srgbClr val="000000"/>
+                </a:solidFill>
+                <a:latin typeface="맑은 고딕"/>
+                <a:ea typeface="맑은 고딕"/>
+              </a:rPr>
+              <a:t>26. 요약</a:t>
+            </a:r>
+          </a:p>
+        </p:txBody>
+      </p:sp>
+      <p:sp>
+        <p:nvSpPr>
+          <p:cNvPr id="3" name="슬라이드 번호 개체 틀 2">
+            <a:extLst>
+              <a:ext uri="{FF2B5EF4-FFF2-40B4-BE49-F238E27FC236}">
+                <a16:creationId xmlns:a16="http://schemas.microsoft.com/office/drawing/2014/main" id="{12CF30EE-4DFD-8063-56B8-B8689E76DFCA}"/>
+              </a:ext>
+            </a:extLst>
+          </p:cNvPr>
+          <p:cNvSpPr>
+            <a:spLocks noGrp="1"/>
+          </p:cNvSpPr>
+          <p:nvPr>
+            <p:ph type="sldNum" sz="quarter" idx="10"/>
+          </p:nvPr>
+        </p:nvSpPr>
+        <p:spPr/>
+        <p:txBody>
+          <a:bodyPr/>
+          <a:lstStyle/>
+          <a:p>
+            <a:pPr>
+              <a:defRPr/>
+            </a:pPr>
+            <a:r>
+              <a:rPr lang="en-US" altLang="ko-KR">
+                <a:solidFill>
+                  <a:prstClr val="black"/>
+                </a:solidFill>
+              </a:rPr>
+              <a:t>- 27 -</a:t>
+            </a:r>
+          </a:p>
+        </p:txBody>
+      </p:sp>
+      <p:sp>
+        <p:nvSpPr>
+          <p:cNvPr id="5" name="텍스트 개체 틀 4">
+            <a:extLst>
+              <a:ext uri="{FF2B5EF4-FFF2-40B4-BE49-F238E27FC236}">
+                <a16:creationId xmlns:a16="http://schemas.microsoft.com/office/drawing/2014/main" id="{D66274C8-E16F-5AEB-614B-D8D32DA3E8C6}"/>
+              </a:ext>
+            </a:extLst>
+          </p:cNvPr>
+          <p:cNvSpPr>
+            <a:spLocks noGrp="1"/>
+          </p:cNvSpPr>
+          <p:nvPr>
+            <p:ph type="body" sz="quarter" idx="11"/>
+          </p:nvPr>
+        </p:nvSpPr>
+        <p:spPr/>
+        <p:txBody>
+          <a:bodyPr/>
+          <a:lstStyle/>
+          <a:p>
+            <a:r>
+              <a:rPr kumimoji="1" lang="en-US" altLang="ko-KR" sz="1400" dirty="0" err="1"/>
+              <a:t>12. 구현·검증·DevOps와 SW공학 피드백</a:t>
+            </a:r>
+          </a:p>
+        </p:txBody>
+      </p:sp>
+      <p:sp>
+        <p:nvSpPr>
+          <p:cNvPr id="6" name="텍스트 개체 틀 5">
+            <a:extLst>
+              <a:ext uri="{FF2B5EF4-FFF2-40B4-BE49-F238E27FC236}">
+                <a16:creationId xmlns:a16="http://schemas.microsoft.com/office/drawing/2014/main" id="{A24E58E1-194B-A320-AEEE-24D08685BB67}"/>
+              </a:ext>
+            </a:extLst>
+          </p:cNvPr>
+          <p:cNvSpPr>
+            <a:spLocks noGrp="1"/>
+          </p:cNvSpPr>
+          <p:nvPr>
+            <p:ph type="body" sz="quarter" idx="12"/>
+          </p:nvPr>
+        </p:nvSpPr>
+        <p:spPr/>
+        <p:txBody>
+          <a:bodyPr/>
+          <a:lstStyle/>
+          <a:p>
+            <a:endParaRPr kumimoji="1" lang="ko-KR" altLang="en-US" dirty="0"/>
+          </a:p>
+        </p:txBody>
+      </p:sp>
+      <p:sp>
+        <p:nvSpPr>
+          <p:cNvPr id="7" name="텍스트 개체 틀 6">
+            <a:extLst>
+              <a:ext uri="{FF2B5EF4-FFF2-40B4-BE49-F238E27FC236}">
+                <a16:creationId xmlns:a16="http://schemas.microsoft.com/office/drawing/2014/main" id="{A219F420-613B-6234-45F6-0955A9A4505F}"/>
+              </a:ext>
+            </a:extLst>
+          </p:cNvPr>
+          <p:cNvSpPr>
+            <a:spLocks noGrp="1"/>
+          </p:cNvSpPr>
+          <p:nvPr>
+            <p:ph type="body" sz="quarter" idx="13"/>
+          </p:nvPr>
+        </p:nvSpPr>
+        <p:spPr/>
+        <p:txBody>
+          <a:bodyPr/>
+          <a:lstStyle/>
+          <a:p>
+            <a:endParaRPr kumimoji="1" lang="en-US" altLang="ko-KR" dirty="0"/>
+          </a:p>
+        </p:txBody>
+      </p:sp>
+      <p:sp>
+        <p:nvSpPr>
+          <p:cNvPr id="8" name="내용 개체 틀 7">
+            <a:extLst>
+              <a:ext uri="{FF2B5EF4-FFF2-40B4-BE49-F238E27FC236}">
+                <a16:creationId xmlns:a16="http://schemas.microsoft.com/office/drawing/2014/main" id="{BEBA2C4A-B0BF-F2E4-EA6E-614C99CBA184}"/>
+              </a:ext>
+            </a:extLst>
+          </p:cNvPr>
+          <p:cNvSpPr>
+            <a:spLocks noGrp="1"/>
+          </p:cNvSpPr>
+          <p:nvPr>
+            <p:ph idx="1"/>
+          </p:nvPr>
+        </p:nvSpPr>
+        <p:spPr/>
+        <p:txBody>
+          <a:bodyPr>
+            <a:normAutofit/>
+          </a:bodyPr>
+          <a:lstStyle/>
+          <a:p>
+            <a:pPr marL="0" indent="0">
+              <a:spcBef>
+                <a:spcPts val="600"/>
+              </a:spcBef>
+              <a:spcAft>
+                <a:spcPts val="600"/>
+              </a:spcAft>
+              <a:buNone/>
+            </a:pPr>
+            <a:r>
+              <a:rPr sz="1800" b="0">
+                <a:solidFill>
+                  <a:srgbClr val="000000"/>
+                </a:solidFill>
+                <a:latin typeface="맑은 고딕"/>
+                <a:ea typeface="맑은 고딕"/>
+              </a:rPr>
+              <a:t>이 세션은 구현·검증·배포·운영의 </a:t>
+            </a:r>
+            <a:r>
+              <a:rPr sz="1800" b="1">
+                <a:solidFill>
+                  <a:srgbClr val="000000"/>
+                </a:solidFill>
+                <a:latin typeface="맑은 고딕"/>
+                <a:ea typeface="맑은 고딕"/>
+              </a:rPr>
+              <a:t>evidence</a:t>
+            </a:r>
+            <a:r>
+              <a:rPr sz="1800" b="0">
+                <a:solidFill>
+                  <a:srgbClr val="000000"/>
+                </a:solidFill>
+                <a:latin typeface="맑은 고딕"/>
+                <a:ea typeface="맑은 고딕"/>
+              </a:rPr>
+              <a:t>로 다시 열 판단을 진단했다.</a:t>
+            </a:r>
+          </a:p>
+          <a:p>
+            <a:pPr marL="342900" indent="0">
+              <a:spcBef>
+                <a:spcPts val="600"/>
+              </a:spcBef>
+              <a:spcAft>
+                <a:spcPts val="600"/>
+              </a:spcAft>
+              <a:buNone/>
+            </a:pPr>
+            <a:r>
+              <a:rPr sz="1800" b="1">
+                <a:solidFill>
+                  <a:srgbClr val="000000"/>
+                </a:solidFill>
+                <a:latin typeface="맑은 고딕"/>
+                <a:ea typeface="맑은 고딕"/>
+              </a:rPr>
+              <a:t>구현·검증·DevOps와 SW공학 피드백의 핵심</a:t>
+            </a:r>
+          </a:p>
+          <a:p>
+            <a:pPr lvl="2" marL="723900" indent="-368300">
+              <a:spcBef>
+                <a:spcPts val="600"/>
+              </a:spcBef>
+              <a:spcAft>
+                <a:spcPts val="600"/>
+              </a:spcAft>
+              <a:buSzPct val="90000"/>
+              <a:buFont typeface="Wingdings" pitchFamily="2" charset="2"/>
+              <a:buChar char=""/>
+            </a:pPr>
+            <a:r>
+              <a:rPr sz="1800" b="1">
+                <a:solidFill>
+                  <a:srgbClr val="000000"/>
+                </a:solidFill>
+                <a:latin typeface="맑은 고딕"/>
+                <a:ea typeface="맑은 고딕"/>
+              </a:rPr>
+              <a:t>원칙</a:t>
+            </a:r>
+            <a:r>
+              <a:rPr sz="1800" b="0">
+                <a:solidFill>
+                  <a:srgbClr val="000000"/>
+                </a:solidFill>
+                <a:latin typeface="맑은 고딕"/>
+                <a:ea typeface="맑은 고딕"/>
+              </a:rPr>
+              <a:t> —</a:t>
+            </a:r>
+            <a:r>
+              <a:rPr sz="1600" b="0">
+                <a:solidFill>
+                  <a:srgbClr val="000000"/>
+                </a:solidFill>
+                <a:latin typeface="맑은 고딕"/>
+                <a:ea typeface="맑은 고딕"/>
+              </a:rPr>
+              <a:t> 발견 위치와 원인 수준은 다르다. DevOps는 그 feedback을 빠르게 되돌린다</a:t>
+            </a:r>
+          </a:p>
+          <a:p>
+            <a:pPr lvl="2" marL="723900" indent="-368300">
+              <a:spcBef>
+                <a:spcPts val="600"/>
+              </a:spcBef>
+              <a:spcAft>
+                <a:spcPts val="600"/>
+              </a:spcAft>
+              <a:buSzPct val="90000"/>
+              <a:buFont typeface="Wingdings" pitchFamily="2" charset="2"/>
+              <a:buChar char=""/>
+            </a:pPr>
+            <a:r>
+              <a:rPr sz="1800" b="1">
+                <a:solidFill>
+                  <a:srgbClr val="000000"/>
+                </a:solidFill>
+                <a:latin typeface="맑은 고딕"/>
+                <a:ea typeface="맑은 고딕"/>
+              </a:rPr>
+              <a:t>TDD 주기</a:t>
+            </a:r>
+            <a:r>
+              <a:rPr sz="1800" b="0">
+                <a:solidFill>
+                  <a:srgbClr val="000000"/>
+                </a:solidFill>
+                <a:latin typeface="맑은 고딕"/>
+                <a:ea typeface="맑은 고딕"/>
+              </a:rPr>
+              <a:t> —</a:t>
+            </a:r>
+            <a:r>
+              <a:rPr sz="1600" b="0">
+                <a:solidFill>
+                  <a:srgbClr val="000000"/>
+                </a:solidFill>
+                <a:latin typeface="맑은 고딕"/>
+                <a:ea typeface="맑은 고딕"/>
+              </a:rPr>
+              <a:t> 빨강</a:t>
+            </a:r>
+            <a:r>
+              <a:rPr sz="1200" b="0">
+                <a:solidFill>
+                  <a:srgbClr val="000000"/>
+                </a:solidFill>
+                <a:latin typeface="맑은 고딕"/>
+                <a:ea typeface="맑은 고딕"/>
+              </a:rPr>
+              <a:t>(증상 재현)</a:t>
+            </a:r>
+            <a:r>
+              <a:rPr sz="1600" b="0">
+                <a:solidFill>
+                  <a:srgbClr val="000000"/>
+                </a:solidFill>
+                <a:latin typeface="맑은 고딕"/>
+                <a:ea typeface="맑은 고딕"/>
+              </a:rPr>
+              <a:t>, 초록</a:t>
+            </a:r>
+            <a:r>
+              <a:rPr sz="1200" b="0">
+                <a:solidFill>
+                  <a:srgbClr val="000000"/>
+                </a:solidFill>
+                <a:latin typeface="맑은 고딕"/>
+                <a:ea typeface="맑은 고딕"/>
+              </a:rPr>
+              <a:t>(가장 작은 수정)</a:t>
+            </a:r>
+            <a:r>
+              <a:rPr sz="1600" b="0">
+                <a:solidFill>
+                  <a:srgbClr val="000000"/>
+                </a:solidFill>
+                <a:latin typeface="맑은 고딕"/>
+                <a:ea typeface="맑은 고딕"/>
+              </a:rPr>
+              <a:t>, 리팩터링</a:t>
+            </a:r>
+            <a:r>
+              <a:rPr sz="1200" b="0">
+                <a:solidFill>
+                  <a:srgbClr val="000000"/>
+                </a:solidFill>
+                <a:latin typeface="맑은 고딕"/>
+                <a:ea typeface="맑은 고딕"/>
+              </a:rPr>
+              <a:t>(같은 기대값으로 구조만)</a:t>
+            </a:r>
+          </a:p>
+          <a:p>
+            <a:pPr lvl="2" marL="723900" indent="-368300">
+              <a:spcBef>
+                <a:spcPts val="600"/>
+              </a:spcBef>
+              <a:spcAft>
+                <a:spcPts val="600"/>
+              </a:spcAft>
+              <a:buSzPct val="90000"/>
+              <a:buFont typeface="Wingdings" pitchFamily="2" charset="2"/>
+              <a:buChar char=""/>
+            </a:pPr>
+            <a:r>
+              <a:rPr sz="1800" b="1">
+                <a:solidFill>
+                  <a:srgbClr val="000000"/>
+                </a:solidFill>
+                <a:latin typeface="맑은 고딕"/>
+                <a:ea typeface="맑은 고딕"/>
+              </a:rPr>
+              <a:t>파이프라인</a:t>
+            </a:r>
+            <a:r>
+              <a:rPr sz="1800" b="0">
+                <a:solidFill>
+                  <a:srgbClr val="000000"/>
+                </a:solidFill>
+                <a:latin typeface="맑은 고딕"/>
+                <a:ea typeface="맑은 고딕"/>
+              </a:rPr>
+              <a:t> —</a:t>
+            </a:r>
+            <a:r>
+              <a:rPr sz="1600" b="0">
+                <a:solidFill>
+                  <a:srgbClr val="000000"/>
+                </a:solidFill>
+                <a:latin typeface="맑은 고딕"/>
+                <a:ea typeface="맑은 고딕"/>
+              </a:rPr>
+              <a:t> IDE·pre-commit·CI·CD·운영. 같은 문제는 가장 이른 층에서 잡는다</a:t>
+            </a:r>
+          </a:p>
+          <a:p>
+            <a:pPr lvl="2" marL="723900" indent="-368300">
+              <a:spcBef>
+                <a:spcPts val="600"/>
+              </a:spcBef>
+              <a:spcAft>
+                <a:spcPts val="600"/>
+              </a:spcAft>
+              <a:buSzPct val="90000"/>
+              <a:buFont typeface="Wingdings" pitchFamily="2" charset="2"/>
+              <a:buChar char=""/>
+            </a:pPr>
+            <a:r>
+              <a:rPr sz="1800" b="1">
+                <a:solidFill>
+                  <a:srgbClr val="000000"/>
+                </a:solidFill>
+                <a:latin typeface="맑은 고딕"/>
+                <a:ea typeface="맑은 고딕"/>
+              </a:rPr>
+              <a:t>역추적</a:t>
+            </a:r>
+            <a:r>
+              <a:rPr sz="1800" b="0">
+                <a:solidFill>
+                  <a:srgbClr val="000000"/>
+                </a:solidFill>
+                <a:latin typeface="맑은 고딕"/>
+                <a:ea typeface="맑은 고딕"/>
+              </a:rPr>
+              <a:t> —</a:t>
+            </a:r>
+            <a:r>
+              <a:rPr sz="1600" b="0">
+                <a:solidFill>
+                  <a:srgbClr val="000000"/>
+                </a:solidFill>
+                <a:latin typeface="맑은 고딕"/>
+                <a:ea typeface="맑은 고딕"/>
+              </a:rPr>
+              <a:t> 다섯 번의 왜로 원인 수준을 찾고, 그 수준부터 아래로 고친다</a:t>
+            </a:r>
+          </a:p>
+          <a:p>
+            <a:pPr lvl="2" marL="723900" indent="-368300">
+              <a:spcBef>
+                <a:spcPts val="600"/>
+              </a:spcBef>
+              <a:spcAft>
+                <a:spcPts val="600"/>
+              </a:spcAft>
+              <a:buSzPct val="90000"/>
+              <a:buFont typeface="Wingdings" pitchFamily="2" charset="2"/>
+              <a:buChar char=""/>
+            </a:pPr>
+            <a:r>
+              <a:rPr sz="1800" b="1">
+                <a:solidFill>
+                  <a:srgbClr val="000000"/>
+                </a:solidFill>
+                <a:latin typeface="맑은 고딕"/>
+                <a:ea typeface="맑은 고딕"/>
+              </a:rPr>
+              <a:t>잘못된 관행</a:t>
+            </a:r>
+            <a:r>
+              <a:rPr sz="1800" b="0">
+                <a:solidFill>
+                  <a:srgbClr val="000000"/>
+                </a:solidFill>
+                <a:latin typeface="맑은 고딕"/>
+                <a:ea typeface="맑은 고딕"/>
+              </a:rPr>
+              <a:t> —</a:t>
+            </a:r>
+            <a:r>
+              <a:rPr sz="1600" b="0">
+                <a:solidFill>
+                  <a:srgbClr val="000000"/>
+                </a:solidFill>
+                <a:latin typeface="맑은 고딕"/>
+                <a:ea typeface="맑은 고딕"/>
+              </a:rPr>
+              <a:t> 증상 위치에서 고치기, 테스트를 코드에 맞추기, 느린 feedback</a:t>
+            </a:r>
+          </a:p>
+          <a:p>
+            <a:pPr marL="342900" indent="0">
+              <a:spcBef>
+                <a:spcPts val="600"/>
+              </a:spcBef>
+              <a:spcAft>
+                <a:spcPts val="600"/>
+              </a:spcAft>
+              <a:buNone/>
+            </a:pPr>
+            <a:r>
+              <a:rPr sz="1800" b="1">
+                <a:solidFill>
+                  <a:srgbClr val="000000"/>
+                </a:solidFill>
+                <a:latin typeface="맑은 고딕"/>
+                <a:ea typeface="맑은 고딕"/>
+              </a:rPr>
+              <a:t>다음 세션</a:t>
+            </a:r>
+          </a:p>
+          <a:p>
+            <a:pPr lvl="2" marL="723900" indent="-368300">
+              <a:spcBef>
+                <a:spcPts val="600"/>
+              </a:spcBef>
+              <a:spcAft>
+                <a:spcPts val="600"/>
+              </a:spcAft>
+              <a:buSzPct val="90000"/>
+              <a:buFont typeface="Wingdings" pitchFamily="2" charset="2"/>
+              <a:buChar char=""/>
+            </a:pPr>
+            <a:r>
+              <a:rPr sz="1800" b="0">
+                <a:solidFill>
+                  <a:srgbClr val="000000"/>
+                </a:solidFill>
+                <a:latin typeface="맑은 고딕"/>
+                <a:ea typeface="맑은 고딕"/>
+              </a:rPr>
+              <a:t>"</a:t>
+            </a:r>
+            <a:r>
+              <a:rPr sz="1800" b="1">
+                <a:solidFill>
+                  <a:srgbClr val="000000"/>
+                </a:solidFill>
+                <a:latin typeface="맑은 고딕"/>
+                <a:ea typeface="맑은 고딕"/>
+              </a:rPr>
+              <a:t>13. OOAD에서 전문영역으로 —</a:t>
+            </a:r>
+            <a:r>
+              <a:rPr sz="1600" b="1">
+                <a:solidFill>
+                  <a:srgbClr val="000000"/>
+                </a:solidFill>
+                <a:latin typeface="맑은 고딕"/>
+                <a:ea typeface="맑은 고딕"/>
+              </a:rPr>
+              <a:t> Architecture · DDD · MSA</a:t>
+            </a:r>
+            <a:r>
+              <a:rPr sz="1600" b="0">
+                <a:solidFill>
+                  <a:srgbClr val="000000"/>
+                </a:solidFill>
+                <a:latin typeface="맑은 고딕"/>
+                <a:ea typeface="맑은 고딕"/>
+              </a:rPr>
+              <a:t>" — OOAD의 판단과 전문영역이 더 소유하는 판단을 구분한다.</a:t>
+            </a:r>
+          </a:p>
+        </p:txBody>
+      </p:sp>
+    </p:spTree>
+    <p:extLst>
+      <p:ext uri="{BB962C8B-B14F-4D97-AF65-F5344CB8AC3E}">
+        <p14:creationId xmlns:p14="http://schemas.microsoft.com/office/powerpoint/2010/main" val="3555436673"/>
+      </p:ext>
+    </p:extLst>
+  </p:cSld>
+  <p:clrMapOvr>
+    <a:masterClrMapping/>
+  </p:clrMapOvr>
+</p:sld>
+</file>
+
+<file path=ppt/slides/slide28.xml><?xml version="1.0" encoding="utf-8"?>
 <p:sld xmlns:a="http://schemas.openxmlformats.org/drawingml/2006/main" xmlns:r="http://schemas.openxmlformats.org/officeDocument/2006/relationships" xmlns:p="http://schemas.openxmlformats.org/presentationml/2006/main">
   <p:cSld>
     <p:spTree>
@@ -20342,7 +20857,7 @@
                 <a:latin typeface="맑은 고딕"/>
                 <a:ea typeface="맑은 고딕"/>
               </a:rPr>
-              <a:t>26. 역추적 </a:t>
+              <a:t>역추적 </a:t>
             </a:r>
             <a:r>
               <a:rPr sz="1800" b="1">
@@ -20353,6 +20868,18 @@
                 <a:ea typeface="맑은 고딕"/>
               </a:rPr>
               <a:t>(안)</a:t>
+            </a:r>
+          </a:p>
+          <a:p>
+            <a:r>
+              <a:rPr sz="1100" b="1">
+                <a:solidFill>
+                  <a:srgbClr val="000000"/>
+                </a:solidFill>
+                <a:latin typeface="맑은 고딕"/>
+                <a:ea typeface="맑은 고딕"/>
+              </a:rPr>
+              <a:t>별첨. 실습 답</a:t>
             </a:r>
           </a:p>
         </p:txBody>
@@ -20379,8 +20906,8 @@
           <a:lstStyle/>
           <a:p>
             <a:r>
-              <a:rPr kumimoji="1" lang="en-US" altLang="ko-KR" sz="1400" dirty="0" err="1"/>
-              <a:t>12. 구현·검증·DevOps와 SW공학 피드백</a:t>
+              <a:rPr kumimoji="1" lang="en-US" altLang="ko-KR" sz="1250" dirty="0" err="1"/>
+              <a:t>별첨: 12. 구현·검증·DevOps와 SW공학 피드백</a:t>
             </a:r>
           </a:p>
         </p:txBody>
@@ -21508,7 +22035,7 @@
                 <a:ea typeface="맑은 고딕" panose="020B0503020000020004" pitchFamily="34" charset="-127"/>
                 <a:cs typeface="+mn-cs"/>
               </a:rPr>
-              <a:t>- 27 -</a:t>
+              <a:t>- 28 -</a:t>
             </a:r>
           </a:p>
         </p:txBody>
@@ -21618,7 +22145,7 @@
 </p:sld>
 </file>
 
-<file path=ppt/slides/slide28.xml><?xml version="1.0" encoding="utf-8"?>
+<file path=ppt/slides/slide29.xml><?xml version="1.0" encoding="utf-8"?>
 <p:sld xmlns:a="http://schemas.openxmlformats.org/drawingml/2006/main" xmlns:r="http://schemas.openxmlformats.org/officeDocument/2006/relationships" xmlns:p="http://schemas.openxmlformats.org/presentationml/2006/main">
   <p:cSld>
     <p:spTree>
@@ -21670,7 +22197,7 @@
                 <a:latin typeface="맑은 고딕"/>
                 <a:ea typeface="맑은 고딕"/>
               </a:rPr>
-              <a:t>27. feedback 배치 </a:t>
+              <a:t>feedback 배치 </a:t>
             </a:r>
             <a:r>
               <a:rPr sz="1800" b="1">
@@ -21681,6 +22208,18 @@
                 <a:ea typeface="맑은 고딕"/>
               </a:rPr>
               <a:t>(안)</a:t>
+            </a:r>
+          </a:p>
+          <a:p>
+            <a:r>
+              <a:rPr sz="1100" b="1">
+                <a:solidFill>
+                  <a:srgbClr val="000000"/>
+                </a:solidFill>
+                <a:latin typeface="맑은 고딕"/>
+                <a:ea typeface="맑은 고딕"/>
+              </a:rPr>
+              <a:t>별첨. 실습 답</a:t>
             </a:r>
           </a:p>
         </p:txBody>
@@ -21707,8 +22246,8 @@
           <a:lstStyle/>
           <a:p>
             <a:r>
-              <a:rPr kumimoji="1" lang="en-US" altLang="ko-KR" sz="1400" dirty="0" err="1"/>
-              <a:t>12. 구현·검증·DevOps와 SW공학 피드백</a:t>
+              <a:rPr kumimoji="1" lang="en-US" altLang="ko-KR" sz="1250" dirty="0" err="1"/>
+              <a:t>별첨: 12. 구현·검증·DevOps와 SW공학 피드백</a:t>
             </a:r>
           </a:p>
         </p:txBody>
@@ -22806,7 +23345,7 @@
                 <a:ea typeface="맑은 고딕" panose="020B0503020000020004" pitchFamily="34" charset="-127"/>
                 <a:cs typeface="+mn-cs"/>
               </a:rPr>
-              <a:t>- 28 -</a:t>
+              <a:t>- 29 -</a:t>
             </a:r>
           </a:p>
         </p:txBody>
@@ -22815,750 +23354,6 @@
     <p:extLst>
       <p:ext uri="{BB962C8B-B14F-4D97-AF65-F5344CB8AC3E}">
         <p14:creationId xmlns:p14="http://schemas.microsoft.com/office/powerpoint/2010/main" val="2789569477"/>
-      </p:ext>
-    </p:extLst>
-  </p:cSld>
-  <p:clrMapOvr>
-    <a:masterClrMapping/>
-  </p:clrMapOvr>
-</p:sld>
-</file>
-
-<file path=ppt/slides/slide29.xml><?xml version="1.0" encoding="utf-8"?>
-<p:sld xmlns:a="http://schemas.openxmlformats.org/drawingml/2006/main" xmlns:r="http://schemas.openxmlformats.org/officeDocument/2006/relationships" xmlns:p="http://schemas.openxmlformats.org/presentationml/2006/main">
-  <p:cSld>
-    <p:spTree>
-      <p:nvGrpSpPr>
-        <p:cNvPr id="1" name="">
-          <a:extLst>
-            <a:ext uri="{FF2B5EF4-FFF2-40B4-BE49-F238E27FC236}">
-              <a16:creationId xmlns:a16="http://schemas.microsoft.com/office/drawing/2014/main" id="{8E4F1F13-426B-086B-7D8C-9A58A0F879DB}"/>
-            </a:ext>
-          </a:extLst>
-        </p:cNvPr>
-        <p:cNvGrpSpPr/>
-        <p:nvPr/>
-      </p:nvGrpSpPr>
-      <p:grpSpPr>
-        <a:xfrm>
-          <a:off x="0" y="0"/>
-          <a:ext cx="0" cy="0"/>
-          <a:chOff x="0" y="0"/>
-          <a:chExt cx="0" cy="0"/>
-        </a:xfrm>
-      </p:grpSpPr>
-      <p:sp>
-        <p:nvSpPr>
-          <p:cNvPr id="2" name="제목 1">
-            <a:extLst>
-              <a:ext uri="{FF2B5EF4-FFF2-40B4-BE49-F238E27FC236}">
-                <a16:creationId xmlns:a16="http://schemas.microsoft.com/office/drawing/2014/main" id="{AA26A92D-924E-0575-9551-F8FD7BFD3FAD}"/>
-              </a:ext>
-            </a:extLst>
-          </p:cNvPr>
-          <p:cNvSpPr>
-            <a:spLocks noGrp="1"/>
-          </p:cNvSpPr>
-          <p:nvPr>
-            <p:ph type="title"/>
-          </p:nvPr>
-        </p:nvSpPr>
-        <p:spPr/>
-        <p:txBody>
-          <a:bodyPr/>
-          <a:lstStyle/>
-          <a:p>
-            <a:r>
-              <a:rPr sz="2400" b="1">
-                <a:solidFill>
-                  <a:srgbClr val="000000"/>
-                </a:solidFill>
-                <a:latin typeface="맑은 고딕"/>
-                <a:ea typeface="맑은 고딕"/>
-              </a:rPr>
-              <a:t>28. 피드백 보완 </a:t>
-            </a:r>
-            <a:r>
-              <a:rPr sz="1800" b="1">
-                <a:solidFill>
-                  <a:srgbClr val="000000"/>
-                </a:solidFill>
-                <a:latin typeface="맑은 고딕"/>
-                <a:ea typeface="맑은 고딕"/>
-              </a:rPr>
-              <a:t>(안)</a:t>
-            </a:r>
-          </a:p>
-        </p:txBody>
-      </p:sp>
-      <p:sp>
-        <p:nvSpPr>
-          <p:cNvPr id="3" name="슬라이드 번호 개체 틀 2">
-            <a:extLst>
-              <a:ext uri="{FF2B5EF4-FFF2-40B4-BE49-F238E27FC236}">
-                <a16:creationId xmlns:a16="http://schemas.microsoft.com/office/drawing/2014/main" id="{12CF30EE-4DFD-8063-56B8-B8689E76DFCA}"/>
-              </a:ext>
-            </a:extLst>
-          </p:cNvPr>
-          <p:cNvSpPr>
-            <a:spLocks noGrp="1"/>
-          </p:cNvSpPr>
-          <p:nvPr>
-            <p:ph type="sldNum" sz="quarter" idx="10"/>
-          </p:nvPr>
-        </p:nvSpPr>
-        <p:spPr/>
-        <p:txBody>
-          <a:bodyPr/>
-          <a:lstStyle/>
-          <a:p>
-            <a:pPr>
-              <a:defRPr/>
-            </a:pPr>
-            <a:r>
-              <a:rPr lang="en-US" altLang="ko-KR">
-                <a:solidFill>
-                  <a:prstClr val="black"/>
-                </a:solidFill>
-              </a:rPr>
-              <a:t>- 29 -</a:t>
-            </a:r>
-          </a:p>
-        </p:txBody>
-      </p:sp>
-      <p:sp>
-        <p:nvSpPr>
-          <p:cNvPr id="5" name="텍스트 개체 틀 4">
-            <a:extLst>
-              <a:ext uri="{FF2B5EF4-FFF2-40B4-BE49-F238E27FC236}">
-                <a16:creationId xmlns:a16="http://schemas.microsoft.com/office/drawing/2014/main" id="{D66274C8-E16F-5AEB-614B-D8D32DA3E8C6}"/>
-              </a:ext>
-            </a:extLst>
-          </p:cNvPr>
-          <p:cNvSpPr>
-            <a:spLocks noGrp="1"/>
-          </p:cNvSpPr>
-          <p:nvPr>
-            <p:ph type="body" sz="quarter" idx="11"/>
-          </p:nvPr>
-        </p:nvSpPr>
-        <p:spPr/>
-        <p:txBody>
-          <a:bodyPr/>
-          <a:lstStyle/>
-          <a:p>
-            <a:r>
-              <a:rPr kumimoji="1" lang="en-US" altLang="ko-KR" sz="1400" dirty="0" err="1"/>
-              <a:t>12. 구현·검증·DevOps와 SW공학 피드백</a:t>
-            </a:r>
-          </a:p>
-        </p:txBody>
-      </p:sp>
-      <p:sp>
-        <p:nvSpPr>
-          <p:cNvPr id="6" name="텍스트 개체 틀 5">
-            <a:extLst>
-              <a:ext uri="{FF2B5EF4-FFF2-40B4-BE49-F238E27FC236}">
-                <a16:creationId xmlns:a16="http://schemas.microsoft.com/office/drawing/2014/main" id="{A24E58E1-194B-A320-AEEE-24D08685BB67}"/>
-              </a:ext>
-            </a:extLst>
-          </p:cNvPr>
-          <p:cNvSpPr>
-            <a:spLocks noGrp="1"/>
-          </p:cNvSpPr>
-          <p:nvPr>
-            <p:ph type="body" sz="quarter" idx="12"/>
-          </p:nvPr>
-        </p:nvSpPr>
-        <p:spPr/>
-        <p:txBody>
-          <a:bodyPr/>
-          <a:lstStyle/>
-          <a:p>
-            <a:endParaRPr kumimoji="1" lang="ko-KR" altLang="en-US" dirty="0"/>
-          </a:p>
-        </p:txBody>
-      </p:sp>
-      <p:sp>
-        <p:nvSpPr>
-          <p:cNvPr id="7" name="텍스트 개체 틀 6">
-            <a:extLst>
-              <a:ext uri="{FF2B5EF4-FFF2-40B4-BE49-F238E27FC236}">
-                <a16:creationId xmlns:a16="http://schemas.microsoft.com/office/drawing/2014/main" id="{A219F420-613B-6234-45F6-0955A9A4505F}"/>
-              </a:ext>
-            </a:extLst>
-          </p:cNvPr>
-          <p:cNvSpPr>
-            <a:spLocks noGrp="1"/>
-          </p:cNvSpPr>
-          <p:nvPr>
-            <p:ph type="body" sz="quarter" idx="13"/>
-          </p:nvPr>
-        </p:nvSpPr>
-        <p:spPr/>
-        <p:txBody>
-          <a:bodyPr/>
-          <a:lstStyle/>
-          <a:p>
-            <a:endParaRPr kumimoji="1" lang="en-US" altLang="ko-KR" dirty="0"/>
-          </a:p>
-        </p:txBody>
-      </p:sp>
-      <p:sp>
-        <p:nvSpPr>
-          <p:cNvPr id="8" name="내용 개체 틀 7">
-            <a:extLst>
-              <a:ext uri="{FF2B5EF4-FFF2-40B4-BE49-F238E27FC236}">
-                <a16:creationId xmlns:a16="http://schemas.microsoft.com/office/drawing/2014/main" id="{BEBA2C4A-B0BF-F2E4-EA6E-614C99CBA184}"/>
-              </a:ext>
-            </a:extLst>
-          </p:cNvPr>
-          <p:cNvSpPr>
-            <a:spLocks noGrp="1"/>
-          </p:cNvSpPr>
-          <p:nvPr>
-            <p:ph idx="1"/>
-          </p:nvPr>
-        </p:nvSpPr>
-        <p:spPr>
-          <a:xfrm>
-            <a:off x="233172" y="1414318"/>
-            <a:ext cx="4338828" cy="4898147"/>
-          </a:xfrm>
-        </p:spPr>
-        <p:txBody>
-          <a:bodyPr>
-            <a:normAutofit/>
-          </a:bodyPr>
-          <a:lstStyle/>
-          <a:p>
-            <a:pPr lvl="2" marL="228600" indent="-182880">
-              <a:spcBef>
-                <a:spcPts val="300"/>
-              </a:spcBef>
-              <a:spcAft>
-                <a:spcPts val="300"/>
-              </a:spcAft>
-              <a:buSzPct val="90000"/>
-              <a:buFont typeface="Wingdings" pitchFamily="2" charset="2"/>
-              <a:buChar char=""/>
-            </a:pPr>
-            <a:r>
-              <a:rPr sz="1400" b="1">
-                <a:solidFill>
-                  <a:srgbClr val="000000"/>
-                </a:solidFill>
-                <a:latin typeface="맑은 고딕"/>
-                <a:ea typeface="맑은 고딕"/>
-              </a:rPr>
-              <a:t>동적 모델</a:t>
-            </a:r>
-            <a:r>
-              <a:rPr sz="1000" b="0">
-                <a:solidFill>
-                  <a:srgbClr val="000000"/>
-                </a:solidFill>
-                <a:latin typeface="맑은 고딕"/>
-                <a:ea typeface="맑은 고딕"/>
-              </a:rPr>
-              <a:t>(실습 11 보완)</a:t>
-            </a:r>
-          </a:p>
-          <a:p>
-            <a:pPr lvl="3" marL="457200" indent="-182880">
-              <a:spcBef>
-                <a:spcPts val="300"/>
-              </a:spcBef>
-              <a:spcAft>
-                <a:spcPts val="300"/>
-              </a:spcAft>
-              <a:buSzPct val="90000"/>
-              <a:buFont typeface="Wingdings" pitchFamily="2" charset="2"/>
-              <a:buChar char=""/>
-            </a:pPr>
-            <a:r>
-              <a:rPr sz="1200" b="1">
-                <a:solidFill>
-                  <a:srgbClr val="000000"/>
-                </a:solidFill>
-                <a:latin typeface="맑은 고딕"/>
-                <a:ea typeface="맑은 고딕"/>
-              </a:rPr>
-              <a:t>새 상태</a:t>
-            </a:r>
-            <a:r>
-              <a:rPr sz="1200" b="0">
-                <a:solidFill>
-                  <a:srgbClr val="000000"/>
-                </a:solidFill>
-                <a:latin typeface="맑은 고딕"/>
-                <a:ea typeface="맑은 고딕"/>
-              </a:rPr>
-              <a:t> —</a:t>
-            </a:r>
-            <a:r>
-              <a:rPr sz="1000" b="0">
-                <a:solidFill>
-                  <a:srgbClr val="000000"/>
-                </a:solidFill>
-                <a:latin typeface="맑은 고딕"/>
-                <a:ea typeface="맑은 고딕"/>
-              </a:rPr>
-              <a:t> 회차 상태에 배송 요청됨: 예정 → 배송 요청됨 → 배송됨</a:t>
-            </a:r>
-          </a:p>
-          <a:p>
-            <a:pPr lvl="2" marL="228600" indent="-182880">
-              <a:spcBef>
-                <a:spcPts val="300"/>
-              </a:spcBef>
-              <a:spcAft>
-                <a:spcPts val="300"/>
-              </a:spcAft>
-              <a:buSzPct val="90000"/>
-              <a:buFont typeface="Wingdings" pitchFamily="2" charset="2"/>
-              <a:buChar char=""/>
-            </a:pPr>
-            <a:r>
-              <a:rPr sz="1400" b="1">
-                <a:solidFill>
-                  <a:srgbClr val="000000"/>
-                </a:solidFill>
-                <a:latin typeface="맑은 고딕"/>
-                <a:ea typeface="맑은 고딕"/>
-              </a:rPr>
-              <a:t>용어집</a:t>
-            </a:r>
-            <a:r>
-              <a:rPr sz="1000" b="0">
-                <a:solidFill>
-                  <a:srgbClr val="000000"/>
-                </a:solidFill>
-                <a:latin typeface="맑은 고딕"/>
-                <a:ea typeface="맑은 고딕"/>
-              </a:rPr>
-              <a:t>(실습 2)</a:t>
-            </a:r>
-          </a:p>
-          <a:p>
-            <a:pPr lvl="3" marL="457200" indent="-182880">
-              <a:spcBef>
-                <a:spcPts val="300"/>
-              </a:spcBef>
-              <a:spcAft>
-                <a:spcPts val="300"/>
-              </a:spcAft>
-              <a:buSzPct val="90000"/>
-              <a:buFont typeface="Wingdings" pitchFamily="2" charset="2"/>
-              <a:buChar char=""/>
-            </a:pPr>
-            <a:r>
-              <a:rPr sz="1200" b="1">
-                <a:solidFill>
-                  <a:srgbClr val="000000"/>
-                </a:solidFill>
-                <a:latin typeface="맑은 고딕"/>
-                <a:ea typeface="맑은 고딕"/>
-              </a:rPr>
-              <a:t>새 용어</a:t>
-            </a:r>
-            <a:r>
-              <a:rPr sz="1200" b="0">
-                <a:solidFill>
-                  <a:srgbClr val="000000"/>
-                </a:solidFill>
-                <a:latin typeface="맑은 고딕"/>
-                <a:ea typeface="맑은 고딕"/>
-              </a:rPr>
-              <a:t> —</a:t>
-            </a:r>
-            <a:r>
-              <a:rPr sz="1000" b="0">
-                <a:solidFill>
-                  <a:srgbClr val="000000"/>
-                </a:solidFill>
-                <a:latin typeface="맑은 고딕"/>
-                <a:ea typeface="맑은 고딕"/>
-              </a:rPr>
-              <a:t> 배송 요청됨</a:t>
-            </a:r>
-            <a:r>
-              <a:rPr sz="800" b="0">
-                <a:solidFill>
-                  <a:srgbClr val="000000"/>
-                </a:solidFill>
-                <a:latin typeface="맑은 고딕"/>
-                <a:ea typeface="맑은 고딕"/>
-              </a:rPr>
-              <a:t>(회차 상태의 여섯째 값)</a:t>
-            </a:r>
-          </a:p>
-          <a:p>
-            <a:pPr lvl="2" marL="228600" indent="-182880">
-              <a:spcBef>
-                <a:spcPts val="300"/>
-              </a:spcBef>
-              <a:spcAft>
-                <a:spcPts val="300"/>
-              </a:spcAft>
-              <a:buSzPct val="90000"/>
-              <a:buFont typeface="Wingdings" pitchFamily="2" charset="2"/>
-              <a:buChar char=""/>
-            </a:pPr>
-            <a:r>
-              <a:rPr sz="1400" b="1">
-                <a:solidFill>
-                  <a:srgbClr val="000000"/>
-                </a:solidFill>
-                <a:latin typeface="맑은 고딕"/>
-                <a:ea typeface="맑은 고딕"/>
-              </a:rPr>
-              <a:t>설계·계약</a:t>
-            </a:r>
-            <a:r>
-              <a:rPr sz="1000" b="0">
-                <a:solidFill>
-                  <a:srgbClr val="000000"/>
-                </a:solidFill>
-                <a:latin typeface="맑은 고딕"/>
-                <a:ea typeface="맑은 고딕"/>
-              </a:rPr>
-              <a:t>(실습 7)</a:t>
-            </a:r>
-          </a:p>
-          <a:p>
-            <a:pPr lvl="3" marL="457200" indent="-182880">
-              <a:spcBef>
-                <a:spcPts val="300"/>
-              </a:spcBef>
-              <a:spcAft>
-                <a:spcPts val="300"/>
-              </a:spcAft>
-              <a:buSzPct val="90000"/>
-              <a:buFont typeface="Wingdings" pitchFamily="2" charset="2"/>
-              <a:buChar char=""/>
-            </a:pPr>
-            <a:r>
-              <a:rPr sz="1200" b="1">
-                <a:solidFill>
-                  <a:srgbClr val="000000"/>
-                </a:solidFill>
-                <a:latin typeface="맑은 고딕"/>
-                <a:ea typeface="맑은 고딕"/>
-              </a:rPr>
-              <a:t>해지</a:t>
-            </a:r>
-            <a:r>
-              <a:rPr sz="1200" b="0">
-                <a:solidFill>
-                  <a:srgbClr val="000000"/>
-                </a:solidFill>
-                <a:latin typeface="맑은 고딕"/>
-                <a:ea typeface="맑은 고딕"/>
-              </a:rPr>
-              <a:t> —</a:t>
-            </a:r>
-            <a:r>
-              <a:rPr sz="1000" b="0">
-                <a:solidFill>
-                  <a:srgbClr val="000000"/>
-                </a:solidFill>
-                <a:latin typeface="맑은 고딕"/>
-                <a:ea typeface="맑은 고딕"/>
-              </a:rPr>
-              <a:t> 사후조건: 예정 회차는 취소됨, 배송 요청된 회차는 그대로</a:t>
-            </a:r>
-          </a:p>
-        </p:txBody>
-      </p:sp>
-      <p:sp>
-        <p:nvSpPr>
-          <p:cNvPr id="9" name="내용 개체 틀 7">
-            <a:extLst>
-              <a:ext uri="{FF2B5EF4-FFF2-40B4-BE49-F238E27FC236}">
-                <a16:creationId xmlns:a16="http://schemas.microsoft.com/office/drawing/2014/main" id="{BEBA2C4A-B0BF-F2E4-EA6E-614C99CBA184}"/>
-              </a:ext>
-            </a:extLst>
-          </p:cNvPr>
-          <p:cNvSpPr>
-            <a:spLocks noGrp="1"/>
-          </p:cNvSpPr>
-          <p:nvPr>
-            <p:ph idx="1"/>
-          </p:nvPr>
-        </p:nvSpPr>
-        <p:spPr>
-          <a:xfrm>
-            <a:off x="233172" y="960120"/>
-            <a:ext cx="8778240" cy="454198"/>
-          </a:xfrm>
-        </p:spPr>
-        <p:txBody>
-          <a:bodyPr>
-            <a:normAutofit/>
-          </a:bodyPr>
-          <a:lstStyle/>
-          <a:p>
-            <a:pPr marL="0" indent="0">
-              <a:spcBef>
-                <a:spcPts val="300"/>
-              </a:spcBef>
-              <a:spcAft>
-                <a:spcPts val="300"/>
-              </a:spcAft>
-              <a:buNone/>
-            </a:pPr>
-            <a:r>
-              <a:rPr sz="1400" b="0">
-                <a:solidFill>
-                  <a:srgbClr val="000000"/>
-                </a:solidFill>
-                <a:latin typeface="맑은 고딕"/>
-                <a:ea typeface="맑은 고딕"/>
-              </a:rPr>
-              <a:t>역추적에서 찾은 것은 </a:t>
-            </a:r>
-            <a:r>
-              <a:rPr sz="1400" b="1">
-                <a:solidFill>
-                  <a:srgbClr val="000000"/>
-                </a:solidFill>
-                <a:latin typeface="맑은 고딕"/>
-                <a:ea typeface="맑은 고딕"/>
-              </a:rPr>
-              <a:t>원인 수준부터 아래로</a:t>
-            </a:r>
-            <a:r>
-              <a:rPr sz="1400" b="0">
-                <a:solidFill>
-                  <a:srgbClr val="000000"/>
-                </a:solidFill>
-                <a:latin typeface="맑은 고딕"/>
-                <a:ea typeface="맑은 고딕"/>
-              </a:rPr>
-              <a:t> 이전 산출물에 반영한다.</a:t>
-            </a:r>
-          </a:p>
-        </p:txBody>
-      </p:sp>
-      <p:sp>
-        <p:nvSpPr>
-          <p:cNvPr id="10" name="내용 개체 틀 7">
-            <a:extLst>
-              <a:ext uri="{FF2B5EF4-FFF2-40B4-BE49-F238E27FC236}">
-                <a16:creationId xmlns:a16="http://schemas.microsoft.com/office/drawing/2014/main" id="{BEBA2C4A-B0BF-F2E4-EA6E-614C99CBA184}"/>
-              </a:ext>
-            </a:extLst>
-          </p:cNvPr>
-          <p:cNvSpPr>
-            <a:spLocks noGrp="1"/>
-          </p:cNvSpPr>
-          <p:nvPr>
-            <p:ph idx="1"/>
-          </p:nvPr>
-        </p:nvSpPr>
-        <p:spPr>
-          <a:xfrm>
-            <a:off x="4572000" y="1414318"/>
-            <a:ext cx="4439412" cy="4898147"/>
-          </a:xfrm>
-        </p:spPr>
-        <p:txBody>
-          <a:bodyPr>
-            <a:normAutofit/>
-          </a:bodyPr>
-          <a:lstStyle/>
-          <a:p>
-            <a:pPr lvl="2" marL="228600" indent="-182880">
-              <a:spcBef>
-                <a:spcPts val="300"/>
-              </a:spcBef>
-              <a:spcAft>
-                <a:spcPts val="300"/>
-              </a:spcAft>
-              <a:buSzPct val="90000"/>
-              <a:buFont typeface="Wingdings" pitchFamily="2" charset="2"/>
-              <a:buChar char=""/>
-            </a:pPr>
-            <a:r>
-              <a:rPr sz="1400" b="1">
-                <a:solidFill>
-                  <a:srgbClr val="000000"/>
-                </a:solidFill>
-                <a:latin typeface="맑은 고딕"/>
-                <a:ea typeface="맑은 고딕"/>
-              </a:rPr>
-              <a:t>유스케이스 명세서</a:t>
-            </a:r>
-            <a:r>
-              <a:rPr sz="1000" b="0">
-                <a:solidFill>
-                  <a:srgbClr val="000000"/>
-                </a:solidFill>
-                <a:latin typeface="맑은 고딕"/>
-                <a:ea typeface="맑은 고딕"/>
-              </a:rPr>
-              <a:t>(실습 2)</a:t>
-            </a:r>
-          </a:p>
-          <a:p>
-            <a:pPr lvl="3" marL="457200" indent="-182880">
-              <a:spcBef>
-                <a:spcPts val="300"/>
-              </a:spcBef>
-              <a:spcAft>
-                <a:spcPts val="300"/>
-              </a:spcAft>
-              <a:buSzPct val="90000"/>
-              <a:buFont typeface="Wingdings" pitchFamily="2" charset="2"/>
-              <a:buChar char=""/>
-            </a:pPr>
-            <a:r>
-              <a:rPr sz="1200" b="1">
-                <a:solidFill>
-                  <a:srgbClr val="000000"/>
-                </a:solidFill>
-                <a:latin typeface="맑은 고딕"/>
-                <a:ea typeface="맑은 고딕"/>
-              </a:rPr>
-              <a:t>1c 결과</a:t>
-            </a:r>
-            <a:r>
-              <a:rPr sz="1200" b="0">
-                <a:solidFill>
-                  <a:srgbClr val="000000"/>
-                </a:solidFill>
-                <a:latin typeface="맑은 고딕"/>
-                <a:ea typeface="맑은 고딕"/>
-              </a:rPr>
-              <a:t> —</a:t>
-            </a:r>
-            <a:r>
-              <a:rPr sz="1000" b="0">
-                <a:solidFill>
-                  <a:srgbClr val="000000"/>
-                </a:solidFill>
-                <a:latin typeface="맑은 고딕"/>
-                <a:ea typeface="맑은 고딕"/>
-              </a:rPr>
-              <a:t> 해지 확인에 배송될 회차를 안내한다</a:t>
-            </a:r>
-          </a:p>
-          <a:p>
-            <a:pPr lvl="2" marL="228600" indent="-182880">
-              <a:spcBef>
-                <a:spcPts val="300"/>
-              </a:spcBef>
-              <a:spcAft>
-                <a:spcPts val="300"/>
-              </a:spcAft>
-              <a:buSzPct val="90000"/>
-              <a:buFont typeface="Wingdings" pitchFamily="2" charset="2"/>
-              <a:buChar char=""/>
-            </a:pPr>
-            <a:r>
-              <a:rPr sz="1400" b="1">
-                <a:solidFill>
-                  <a:srgbClr val="000000"/>
-                </a:solidFill>
-                <a:latin typeface="맑은 고딕"/>
-                <a:ea typeface="맑은 고딕"/>
-              </a:rPr>
-              <a:t>※ 현행화 기준</a:t>
-            </a:r>
-          </a:p>
-          <a:p>
-            <a:pPr lvl="3" marL="457200" indent="-182880">
-              <a:spcBef>
-                <a:spcPts val="300"/>
-              </a:spcBef>
-              <a:spcAft>
-                <a:spcPts val="300"/>
-              </a:spcAft>
-              <a:buSzPct val="90000"/>
-              <a:buFont typeface="Wingdings" pitchFamily="2" charset="2"/>
-              <a:buChar char=""/>
-            </a:pPr>
-            <a:r>
-              <a:rPr sz="1200" b="1">
-                <a:solidFill>
-                  <a:srgbClr val="000000"/>
-                </a:solidFill>
-                <a:latin typeface="맑은 고딕"/>
-                <a:ea typeface="맑은 고딕"/>
-              </a:rPr>
-              <a:t>반영</a:t>
-            </a:r>
-            <a:r>
-              <a:rPr sz="1200" b="0">
-                <a:solidFill>
-                  <a:srgbClr val="000000"/>
-                </a:solidFill>
-                <a:latin typeface="맑은 고딕"/>
-                <a:ea typeface="맑은 고딕"/>
-              </a:rPr>
-              <a:t> —</a:t>
-            </a:r>
-            <a:r>
-              <a:rPr sz="1000" b="0">
-                <a:solidFill>
-                  <a:srgbClr val="000000"/>
-                </a:solidFill>
-                <a:latin typeface="맑은 고딕"/>
-                <a:ea typeface="맑은 고딕"/>
-              </a:rPr>
-              <a:t> 상태 기계, 용어집, 계약, 유스케이스.</a:t>
-            </a:r>
-          </a:p>
-          <a:p>
-            <a:pPr lvl="3" marL="457200" indent="-182880">
-              <a:spcBef>
-                <a:spcPts val="300"/>
-              </a:spcBef>
-              <a:spcAft>
-                <a:spcPts val="300"/>
-              </a:spcAft>
-              <a:buSzPct val="90000"/>
-              <a:buFont typeface="Wingdings" pitchFamily="2" charset="2"/>
-              <a:buChar char=""/>
-            </a:pPr>
-            <a:r>
-              <a:rPr sz="1200" b="1">
-                <a:solidFill>
-                  <a:srgbClr val="000000"/>
-                </a:solidFill>
-                <a:latin typeface="맑은 고딕"/>
-                <a:ea typeface="맑은 고딕"/>
-              </a:rPr>
-              <a:t>기록만</a:t>
-            </a:r>
-            <a:r>
-              <a:rPr sz="1200" b="0">
-                <a:solidFill>
-                  <a:srgbClr val="000000"/>
-                </a:solidFill>
-                <a:latin typeface="맑은 고딕"/>
-                <a:ea typeface="맑은 고딕"/>
-              </a:rPr>
-              <a:t> —</a:t>
-            </a:r>
-            <a:r>
-              <a:rPr sz="1000" b="0">
-                <a:solidFill>
-                  <a:srgbClr val="000000"/>
-                </a:solidFill>
-                <a:latin typeface="맑은 고딕"/>
-                <a:ea typeface="맑은 고딕"/>
-              </a:rPr>
-              <a:t> 운영 지표의 정의.</a:t>
-            </a:r>
-          </a:p>
-        </p:txBody>
-      </p:sp>
-    </p:spTree>
-    <p:extLst>
-      <p:ext uri="{BB962C8B-B14F-4D97-AF65-F5344CB8AC3E}">
-        <p14:creationId xmlns:p14="http://schemas.microsoft.com/office/powerpoint/2010/main" val="3555436673"/>
       </p:ext>
     </p:extLst>
   </p:cSld>
@@ -24160,7 +23955,29 @@
                 <a:latin typeface="맑은 고딕"/>
                 <a:ea typeface="맑은 고딕"/>
               </a:rPr>
-              <a:t>29. 요약</a:t>
+              <a:t>피드백 보완 </a:t>
+            </a:r>
+            <a:r>
+              <a:rPr sz="1800" b="1">
+                <a:solidFill>
+                  <a:srgbClr val="000000"/>
+                </a:solidFill>
+                <a:latin typeface="맑은 고딕"/>
+                <a:ea typeface="맑은 고딕"/>
+              </a:rPr>
+              <a:t>(안)</a:t>
+            </a:r>
+          </a:p>
+          <a:p>
+            <a:r>
+              <a:rPr sz="1100" b="1">
+                <a:solidFill>
+                  <a:srgbClr val="000000"/>
+                </a:solidFill>
+                <a:latin typeface="맑은 고딕"/>
+                <a:ea typeface="맑은 고딕"/>
+              </a:rPr>
+              <a:t>별첨. 실습 답</a:t>
             </a:r>
           </a:p>
         </p:txBody>
@@ -24222,8 +24039,8 @@
           <a:lstStyle/>
           <a:p>
             <a:r>
-              <a:rPr kumimoji="1" lang="en-US" altLang="ko-KR" sz="1400" dirty="0" err="1"/>
-              <a:t>12. 구현·검증·DevOps와 SW공학 피드백</a:t>
+              <a:rPr kumimoji="1" lang="en-US" altLang="ko-KR" sz="1250" dirty="0" err="1"/>
+              <a:t>별첨: 12. 구현·검증·DevOps와 SW공학 피드백</a:t>
             </a:r>
           </a:p>
         </p:txBody>
@@ -24294,411 +24111,537 @@
             <p:ph idx="1"/>
           </p:nvPr>
         </p:nvSpPr>
-        <p:spPr/>
+        <p:spPr>
+          <a:xfrm>
+            <a:off x="233172" y="1414318"/>
+            <a:ext cx="4338828" cy="4898147"/>
+          </a:xfrm>
+        </p:spPr>
         <p:txBody>
           <a:bodyPr>
             <a:normAutofit/>
           </a:bodyPr>
           <a:lstStyle/>
           <a:p>
-            <a:pPr marL="0" indent="0">
+            <a:pPr lvl="2" marL="228600" indent="-182880">
               <a:spcBef>
-                <a:spcPts val="600"/>
+                <a:spcPts val="300"/>
               </a:spcBef>
               <a:spcAft>
-                <a:spcPts val="600"/>
-              </a:spcAft>
-              <a:buNone/>
-            </a:pPr>
-            <a:r>
-              <a:rPr sz="1800" b="0">
-                <a:solidFill>
-                  <a:srgbClr val="000000"/>
-                </a:solidFill>
-                <a:latin typeface="맑은 고딕"/>
-                <a:ea typeface="맑은 고딕"/>
-              </a:rPr>
-              <a:t>이 세션은 구현·검증·배포·운영의 </a:t>
-            </a:r>
-            <a:r>
-              <a:rPr sz="1800" b="1">
-                <a:solidFill>
-                  <a:srgbClr val="000000"/>
-                </a:solidFill>
-                <a:latin typeface="맑은 고딕"/>
-                <a:ea typeface="맑은 고딕"/>
-              </a:rPr>
-              <a:t>evidence</a:t>
-            </a:r>
-            <a:r>
-              <a:rPr sz="1800" b="0">
-                <a:solidFill>
-                  <a:srgbClr val="000000"/>
-                </a:solidFill>
-                <a:latin typeface="맑은 고딕"/>
-                <a:ea typeface="맑은 고딕"/>
-              </a:rPr>
-              <a:t>로 다시 열 판단을 진단했다.</a:t>
-            </a:r>
-          </a:p>
-          <a:p>
-            <a:pPr marL="342900" indent="0">
-              <a:spcBef>
-                <a:spcPts val="600"/>
-              </a:spcBef>
-              <a:spcAft>
-                <a:spcPts val="600"/>
-              </a:spcAft>
-              <a:buNone/>
-            </a:pPr>
-            <a:r>
-              <a:rPr sz="1800" b="1">
-                <a:solidFill>
-                  <a:srgbClr val="000000"/>
-                </a:solidFill>
-                <a:latin typeface="맑은 고딕"/>
-                <a:ea typeface="맑은 고딕"/>
-              </a:rPr>
-              <a:t>구현·검증·DevOps와 SW공학 피드백의 핵심</a:t>
-            </a:r>
-          </a:p>
-          <a:p>
-            <a:pPr lvl="2" marL="723900" indent="-368300">
-              <a:spcBef>
-                <a:spcPts val="600"/>
-              </a:spcBef>
-              <a:spcAft>
-                <a:spcPts val="600"/>
+                <a:spcPts val="300"/>
               </a:spcAft>
               <a:buSzPct val="90000"/>
               <a:buFont typeface="Wingdings" pitchFamily="2" charset="2"/>
               <a:buChar char=""/>
             </a:pPr>
             <a:r>
-              <a:rPr sz="1800" b="1">
-                <a:solidFill>
-                  <a:srgbClr val="000000"/>
-                </a:solidFill>
-                <a:latin typeface="맑은 고딕"/>
-                <a:ea typeface="맑은 고딕"/>
-              </a:rPr>
-              <a:t>원칙</a:t>
-            </a:r>
-            <a:r>
-              <a:rPr sz="1800" b="0">
-                <a:solidFill>
-                  <a:srgbClr val="000000"/>
-                </a:solidFill>
-                <a:latin typeface="맑은 고딕"/>
-                <a:ea typeface="맑은 고딕"/>
-              </a:rPr>
-              <a:t> —</a:t>
-            </a:r>
-            <a:r>
-              <a:rPr sz="1600" b="0">
-                <a:solidFill>
-                  <a:srgbClr val="000000"/>
-                </a:solidFill>
-                <a:latin typeface="맑은 고딕"/>
-                <a:ea typeface="맑은 고딕"/>
-              </a:rPr>
-              <a:t> 발견 위치와 원인 수준은 다르다. DevOps는 그 feedback을 빠르게 되돌린다</a:t>
-            </a:r>
-          </a:p>
-          <a:p>
-            <a:pPr lvl="2" marL="723900" indent="-368300">
+              <a:rPr sz="1400" b="1">
+                <a:solidFill>
+                  <a:srgbClr val="000000"/>
+                </a:solidFill>
+                <a:latin typeface="맑은 고딕"/>
+                <a:ea typeface="맑은 고딕"/>
+              </a:rPr>
+              <a:t>동적 모델</a:t>
+            </a:r>
+            <a:r>
+              <a:rPr sz="1000" b="0">
+                <a:solidFill>
+                  <a:srgbClr val="000000"/>
+                </a:solidFill>
+                <a:latin typeface="맑은 고딕"/>
+                <a:ea typeface="맑은 고딕"/>
+              </a:rPr>
+              <a:t>(실습 11 보완)</a:t>
+            </a:r>
+          </a:p>
+          <a:p>
+            <a:pPr lvl="3" marL="457200" indent="-182880">
               <a:spcBef>
-                <a:spcPts val="600"/>
+                <a:spcPts val="300"/>
               </a:spcBef>
               <a:spcAft>
-                <a:spcPts val="600"/>
+                <a:spcPts val="300"/>
+              </a:spcAft>
+              <a:buSzPct val="90000"/>
+              <a:buFont typeface="Wingdings" pitchFamily="2" charset="2"/>
+              <a:buChar char=""/>
+            </a:pPr>
+            <a:r>
+              <a:rPr sz="1200" b="1">
+                <a:solidFill>
+                  <a:srgbClr val="000000"/>
+                </a:solidFill>
+                <a:latin typeface="맑은 고딕"/>
+                <a:ea typeface="맑은 고딕"/>
+              </a:rPr>
+              <a:t>새 상태</a:t>
+            </a:r>
+            <a:r>
+              <a:rPr sz="1200" b="0">
+                <a:solidFill>
+                  <a:srgbClr val="000000"/>
+                </a:solidFill>
+                <a:latin typeface="맑은 고딕"/>
+                <a:ea typeface="맑은 고딕"/>
+              </a:rPr>
+              <a:t> —</a:t>
+            </a:r>
+            <a:r>
+              <a:rPr sz="1000" b="0">
+                <a:solidFill>
+                  <a:srgbClr val="000000"/>
+                </a:solidFill>
+                <a:latin typeface="맑은 고딕"/>
+                <a:ea typeface="맑은 고딕"/>
+              </a:rPr>
+              <a:t> 회차 상태에 배송 요청됨: 예정 → 배송 요청됨 → 배송됨</a:t>
+            </a:r>
+          </a:p>
+          <a:p>
+            <a:pPr lvl="2" marL="228600" indent="-182880">
+              <a:spcBef>
+                <a:spcPts val="300"/>
+              </a:spcBef>
+              <a:spcAft>
+                <a:spcPts val="300"/>
               </a:spcAft>
               <a:buSzPct val="90000"/>
               <a:buFont typeface="Wingdings" pitchFamily="2" charset="2"/>
               <a:buChar char=""/>
             </a:pPr>
             <a:r>
-              <a:rPr sz="1800" b="1">
-                <a:solidFill>
-                  <a:srgbClr val="000000"/>
-                </a:solidFill>
-                <a:latin typeface="맑은 고딕"/>
-                <a:ea typeface="맑은 고딕"/>
-              </a:rPr>
-              <a:t>TDD 주기</a:t>
-            </a:r>
-            <a:r>
-              <a:rPr sz="1800" b="0">
-                <a:solidFill>
-                  <a:srgbClr val="000000"/>
-                </a:solidFill>
-                <a:latin typeface="맑은 고딕"/>
-                <a:ea typeface="맑은 고딕"/>
-              </a:rPr>
-              <a:t> —</a:t>
-            </a:r>
-            <a:r>
-              <a:rPr sz="1600" b="0">
-                <a:solidFill>
-                  <a:srgbClr val="000000"/>
-                </a:solidFill>
-                <a:latin typeface="맑은 고딕"/>
-                <a:ea typeface="맑은 고딕"/>
-              </a:rPr>
-              <a:t> 빨강</a:t>
-            </a:r>
-            <a:r>
-              <a:rPr sz="1200" b="0">
-                <a:solidFill>
-                  <a:srgbClr val="000000"/>
-                </a:solidFill>
-                <a:latin typeface="맑은 고딕"/>
-                <a:ea typeface="맑은 고딕"/>
-              </a:rPr>
-              <a:t>(증상 재현)</a:t>
-            </a:r>
-            <a:r>
-              <a:rPr sz="1600" b="0">
-                <a:solidFill>
-                  <a:srgbClr val="000000"/>
-                </a:solidFill>
-                <a:latin typeface="맑은 고딕"/>
-                <a:ea typeface="맑은 고딕"/>
-              </a:rPr>
-              <a:t>, 초록</a:t>
-            </a:r>
-            <a:r>
-              <a:rPr sz="1200" b="0">
-                <a:solidFill>
-                  <a:srgbClr val="000000"/>
-                </a:solidFill>
-                <a:latin typeface="맑은 고딕"/>
-                <a:ea typeface="맑은 고딕"/>
-              </a:rPr>
-              <a:t>(가장 작은 수정)</a:t>
-            </a:r>
-            <a:r>
-              <a:rPr sz="1600" b="0">
-                <a:solidFill>
-                  <a:srgbClr val="000000"/>
-                </a:solidFill>
-                <a:latin typeface="맑은 고딕"/>
-                <a:ea typeface="맑은 고딕"/>
-              </a:rPr>
-              <a:t>, 리팩터링</a:t>
-            </a:r>
-            <a:r>
-              <a:rPr sz="1200" b="0">
-                <a:solidFill>
-                  <a:srgbClr val="000000"/>
-                </a:solidFill>
-                <a:latin typeface="맑은 고딕"/>
-                <a:ea typeface="맑은 고딕"/>
-              </a:rPr>
-              <a:t>(같은 기대값으로 구조만)</a:t>
-            </a:r>
-          </a:p>
-          <a:p>
-            <a:pPr lvl="2" marL="723900" indent="-368300">
+              <a:rPr sz="1400" b="1">
+                <a:solidFill>
+                  <a:srgbClr val="000000"/>
+                </a:solidFill>
+                <a:latin typeface="맑은 고딕"/>
+                <a:ea typeface="맑은 고딕"/>
+              </a:rPr>
+              <a:t>용어집</a:t>
+            </a:r>
+            <a:r>
+              <a:rPr sz="1000" b="0">
+                <a:solidFill>
+                  <a:srgbClr val="000000"/>
+                </a:solidFill>
+                <a:latin typeface="맑은 고딕"/>
+                <a:ea typeface="맑은 고딕"/>
+              </a:rPr>
+              <a:t>(실습 2)</a:t>
+            </a:r>
+          </a:p>
+          <a:p>
+            <a:pPr lvl="3" marL="457200" indent="-182880">
               <a:spcBef>
-                <a:spcPts val="600"/>
+                <a:spcPts val="300"/>
               </a:spcBef>
               <a:spcAft>
-                <a:spcPts val="600"/>
+                <a:spcPts val="300"/>
+              </a:spcAft>
+              <a:buSzPct val="90000"/>
+              <a:buFont typeface="Wingdings" pitchFamily="2" charset="2"/>
+              <a:buChar char=""/>
+            </a:pPr>
+            <a:r>
+              <a:rPr sz="1200" b="1">
+                <a:solidFill>
+                  <a:srgbClr val="000000"/>
+                </a:solidFill>
+                <a:latin typeface="맑은 고딕"/>
+                <a:ea typeface="맑은 고딕"/>
+              </a:rPr>
+              <a:t>새 용어</a:t>
+            </a:r>
+            <a:r>
+              <a:rPr sz="1200" b="0">
+                <a:solidFill>
+                  <a:srgbClr val="000000"/>
+                </a:solidFill>
+                <a:latin typeface="맑은 고딕"/>
+                <a:ea typeface="맑은 고딕"/>
+              </a:rPr>
+              <a:t> —</a:t>
+            </a:r>
+            <a:r>
+              <a:rPr sz="1000" b="0">
+                <a:solidFill>
+                  <a:srgbClr val="000000"/>
+                </a:solidFill>
+                <a:latin typeface="맑은 고딕"/>
+                <a:ea typeface="맑은 고딕"/>
+              </a:rPr>
+              <a:t> 배송 요청됨</a:t>
+            </a:r>
+            <a:r>
+              <a:rPr sz="800" b="0">
+                <a:solidFill>
+                  <a:srgbClr val="000000"/>
+                </a:solidFill>
+                <a:latin typeface="맑은 고딕"/>
+                <a:ea typeface="맑은 고딕"/>
+              </a:rPr>
+              <a:t>(회차 상태의 여섯째 값)</a:t>
+            </a:r>
+          </a:p>
+          <a:p>
+            <a:pPr lvl="2" marL="228600" indent="-182880">
+              <a:spcBef>
+                <a:spcPts val="300"/>
+              </a:spcBef>
+              <a:spcAft>
+                <a:spcPts val="300"/>
               </a:spcAft>
               <a:buSzPct val="90000"/>
               <a:buFont typeface="Wingdings" pitchFamily="2" charset="2"/>
               <a:buChar char=""/>
             </a:pPr>
             <a:r>
-              <a:rPr sz="1800" b="1">
-                <a:solidFill>
-                  <a:srgbClr val="000000"/>
-                </a:solidFill>
-                <a:latin typeface="맑은 고딕"/>
-                <a:ea typeface="맑은 고딕"/>
-              </a:rPr>
-              <a:t>파이프라인</a:t>
-            </a:r>
-            <a:r>
-              <a:rPr sz="1800" b="0">
-                <a:solidFill>
-                  <a:srgbClr val="000000"/>
-                </a:solidFill>
-                <a:latin typeface="맑은 고딕"/>
-                <a:ea typeface="맑은 고딕"/>
-              </a:rPr>
-              <a:t> —</a:t>
-            </a:r>
-            <a:r>
-              <a:rPr sz="1600" b="0">
-                <a:solidFill>
-                  <a:srgbClr val="000000"/>
-                </a:solidFill>
-                <a:latin typeface="맑은 고딕"/>
-                <a:ea typeface="맑은 고딕"/>
-              </a:rPr>
-              <a:t> IDE·pre-commit·CI·CD·운영. 같은 문제는 가장 이른 층에서 잡는다</a:t>
-            </a:r>
-          </a:p>
-          <a:p>
-            <a:pPr lvl="2" marL="723900" indent="-368300">
+              <a:rPr sz="1400" b="1">
+                <a:solidFill>
+                  <a:srgbClr val="000000"/>
+                </a:solidFill>
+                <a:latin typeface="맑은 고딕"/>
+                <a:ea typeface="맑은 고딕"/>
+              </a:rPr>
+              <a:t>설계·계약</a:t>
+            </a:r>
+            <a:r>
+              <a:rPr sz="1000" b="0">
+                <a:solidFill>
+                  <a:srgbClr val="000000"/>
+                </a:solidFill>
+                <a:latin typeface="맑은 고딕"/>
+                <a:ea typeface="맑은 고딕"/>
+              </a:rPr>
+              <a:t>(실습 7)</a:t>
+            </a:r>
+          </a:p>
+          <a:p>
+            <a:pPr lvl="3" marL="457200" indent="-182880">
               <a:spcBef>
-                <a:spcPts val="600"/>
+                <a:spcPts val="300"/>
               </a:spcBef>
               <a:spcAft>
-                <a:spcPts val="600"/>
+                <a:spcPts val="300"/>
+              </a:spcAft>
+              <a:buSzPct val="90000"/>
+              <a:buFont typeface="Wingdings" pitchFamily="2" charset="2"/>
+              <a:buChar char=""/>
+            </a:pPr>
+            <a:r>
+              <a:rPr sz="1200" b="1">
+                <a:solidFill>
+                  <a:srgbClr val="000000"/>
+                </a:solidFill>
+                <a:latin typeface="맑은 고딕"/>
+                <a:ea typeface="맑은 고딕"/>
+              </a:rPr>
+              <a:t>해지</a:t>
+            </a:r>
+            <a:r>
+              <a:rPr sz="1200" b="0">
+                <a:solidFill>
+                  <a:srgbClr val="000000"/>
+                </a:solidFill>
+                <a:latin typeface="맑은 고딕"/>
+                <a:ea typeface="맑은 고딕"/>
+              </a:rPr>
+              <a:t> —</a:t>
+            </a:r>
+            <a:r>
+              <a:rPr sz="1000" b="0">
+                <a:solidFill>
+                  <a:srgbClr val="000000"/>
+                </a:solidFill>
+                <a:latin typeface="맑은 고딕"/>
+                <a:ea typeface="맑은 고딕"/>
+              </a:rPr>
+              <a:t> 사후조건: 예정 회차는 취소됨, 배송 요청된 회차는 그대로</a:t>
+            </a:r>
+          </a:p>
+        </p:txBody>
+      </p:sp>
+      <p:sp>
+        <p:nvSpPr>
+          <p:cNvPr id="9" name="내용 개체 틀 7">
+            <a:extLst>
+              <a:ext uri="{FF2B5EF4-FFF2-40B4-BE49-F238E27FC236}">
+                <a16:creationId xmlns:a16="http://schemas.microsoft.com/office/drawing/2014/main" id="{BEBA2C4A-B0BF-F2E4-EA6E-614C99CBA184}"/>
+              </a:ext>
+            </a:extLst>
+          </p:cNvPr>
+          <p:cNvSpPr>
+            <a:spLocks noGrp="1"/>
+          </p:cNvSpPr>
+          <p:nvPr>
+            <p:ph idx="1"/>
+          </p:nvPr>
+        </p:nvSpPr>
+        <p:spPr>
+          <a:xfrm>
+            <a:off x="233172" y="960120"/>
+            <a:ext cx="8778240" cy="454198"/>
+          </a:xfrm>
+        </p:spPr>
+        <p:txBody>
+          <a:bodyPr>
+            <a:normAutofit/>
+          </a:bodyPr>
+          <a:lstStyle/>
+          <a:p>
+            <a:pPr marL="0" indent="0">
+              <a:spcBef>
+                <a:spcPts val="300"/>
+              </a:spcBef>
+              <a:spcAft>
+                <a:spcPts val="300"/>
+              </a:spcAft>
+              <a:buNone/>
+            </a:pPr>
+            <a:r>
+              <a:rPr sz="1400" b="0">
+                <a:solidFill>
+                  <a:srgbClr val="000000"/>
+                </a:solidFill>
+                <a:latin typeface="맑은 고딕"/>
+                <a:ea typeface="맑은 고딕"/>
+              </a:rPr>
+              <a:t>역추적에서 찾은 것은 </a:t>
+            </a:r>
+            <a:r>
+              <a:rPr sz="1400" b="1">
+                <a:solidFill>
+                  <a:srgbClr val="000000"/>
+                </a:solidFill>
+                <a:latin typeface="맑은 고딕"/>
+                <a:ea typeface="맑은 고딕"/>
+              </a:rPr>
+              <a:t>원인 수준부터 아래로</a:t>
+            </a:r>
+            <a:r>
+              <a:rPr sz="1400" b="0">
+                <a:solidFill>
+                  <a:srgbClr val="000000"/>
+                </a:solidFill>
+                <a:latin typeface="맑은 고딕"/>
+                <a:ea typeface="맑은 고딕"/>
+              </a:rPr>
+              <a:t> 이전 산출물에 반영한다.</a:t>
+            </a:r>
+          </a:p>
+        </p:txBody>
+      </p:sp>
+      <p:sp>
+        <p:nvSpPr>
+          <p:cNvPr id="10" name="내용 개체 틀 7">
+            <a:extLst>
+              <a:ext uri="{FF2B5EF4-FFF2-40B4-BE49-F238E27FC236}">
+                <a16:creationId xmlns:a16="http://schemas.microsoft.com/office/drawing/2014/main" id="{BEBA2C4A-B0BF-F2E4-EA6E-614C99CBA184}"/>
+              </a:ext>
+            </a:extLst>
+          </p:cNvPr>
+          <p:cNvSpPr>
+            <a:spLocks noGrp="1"/>
+          </p:cNvSpPr>
+          <p:nvPr>
+            <p:ph idx="1"/>
+          </p:nvPr>
+        </p:nvSpPr>
+        <p:spPr>
+          <a:xfrm>
+            <a:off x="4572000" y="1414318"/>
+            <a:ext cx="4439412" cy="4898147"/>
+          </a:xfrm>
+        </p:spPr>
+        <p:txBody>
+          <a:bodyPr>
+            <a:normAutofit/>
+          </a:bodyPr>
+          <a:lstStyle/>
+          <a:p>
+            <a:pPr lvl="2" marL="228600" indent="-182880">
+              <a:spcBef>
+                <a:spcPts val="300"/>
+              </a:spcBef>
+              <a:spcAft>
+                <a:spcPts val="300"/>
               </a:spcAft>
               <a:buSzPct val="90000"/>
               <a:buFont typeface="Wingdings" pitchFamily="2" charset="2"/>
               <a:buChar char=""/>
             </a:pPr>
             <a:r>
-              <a:rPr sz="1800" b="1">
-                <a:solidFill>
-                  <a:srgbClr val="000000"/>
-                </a:solidFill>
-                <a:latin typeface="맑은 고딕"/>
-                <a:ea typeface="맑은 고딕"/>
-              </a:rPr>
-              <a:t>역추적</a:t>
-            </a:r>
-            <a:r>
-              <a:rPr sz="1800" b="0">
-                <a:solidFill>
-                  <a:srgbClr val="000000"/>
-                </a:solidFill>
-                <a:latin typeface="맑은 고딕"/>
-                <a:ea typeface="맑은 고딕"/>
-              </a:rPr>
-              <a:t> —</a:t>
-            </a:r>
-            <a:r>
-              <a:rPr sz="1600" b="0">
-                <a:solidFill>
-                  <a:srgbClr val="000000"/>
-                </a:solidFill>
-                <a:latin typeface="맑은 고딕"/>
-                <a:ea typeface="맑은 고딕"/>
-              </a:rPr>
-              <a:t> 다섯 번의 왜로 원인 수준을 찾고, 그 수준부터 아래로 고친다</a:t>
-            </a:r>
-          </a:p>
-          <a:p>
-            <a:pPr lvl="2" marL="723900" indent="-368300">
+              <a:rPr sz="1400" b="1">
+                <a:solidFill>
+                  <a:srgbClr val="000000"/>
+                </a:solidFill>
+                <a:latin typeface="맑은 고딕"/>
+                <a:ea typeface="맑은 고딕"/>
+              </a:rPr>
+              <a:t>유스케이스 명세서</a:t>
+            </a:r>
+            <a:r>
+              <a:rPr sz="1000" b="0">
+                <a:solidFill>
+                  <a:srgbClr val="000000"/>
+                </a:solidFill>
+                <a:latin typeface="맑은 고딕"/>
+                <a:ea typeface="맑은 고딕"/>
+              </a:rPr>
+              <a:t>(실습 2)</a:t>
+            </a:r>
+          </a:p>
+          <a:p>
+            <a:pPr lvl="3" marL="457200" indent="-182880">
               <a:spcBef>
-                <a:spcPts val="600"/>
+                <a:spcPts val="300"/>
               </a:spcBef>
               <a:spcAft>
-                <a:spcPts val="600"/>
+                <a:spcPts val="300"/>
+              </a:spcAft>
+              <a:buSzPct val="90000"/>
+              <a:buFont typeface="Wingdings" pitchFamily="2" charset="2"/>
+              <a:buChar char=""/>
+            </a:pPr>
+            <a:r>
+              <a:rPr sz="1200" b="1">
+                <a:solidFill>
+                  <a:srgbClr val="000000"/>
+                </a:solidFill>
+                <a:latin typeface="맑은 고딕"/>
+                <a:ea typeface="맑은 고딕"/>
+              </a:rPr>
+              <a:t>1c 결과</a:t>
+            </a:r>
+            <a:r>
+              <a:rPr sz="1200" b="0">
+                <a:solidFill>
+                  <a:srgbClr val="000000"/>
+                </a:solidFill>
+                <a:latin typeface="맑은 고딕"/>
+                <a:ea typeface="맑은 고딕"/>
+              </a:rPr>
+              <a:t> —</a:t>
+            </a:r>
+            <a:r>
+              <a:rPr sz="1000" b="0">
+                <a:solidFill>
+                  <a:srgbClr val="000000"/>
+                </a:solidFill>
+                <a:latin typeface="맑은 고딕"/>
+                <a:ea typeface="맑은 고딕"/>
+              </a:rPr>
+              <a:t> 해지 확인에 배송될 회차를 안내한다</a:t>
+            </a:r>
+          </a:p>
+          <a:p>
+            <a:pPr lvl="2" marL="228600" indent="-182880">
+              <a:spcBef>
+                <a:spcPts val="300"/>
+              </a:spcBef>
+              <a:spcAft>
+                <a:spcPts val="300"/>
               </a:spcAft>
               <a:buSzPct val="90000"/>
               <a:buFont typeface="Wingdings" pitchFamily="2" charset="2"/>
               <a:buChar char=""/>
             </a:pPr>
             <a:r>
-              <a:rPr sz="1800" b="1">
-                <a:solidFill>
-                  <a:srgbClr val="000000"/>
-                </a:solidFill>
-                <a:latin typeface="맑은 고딕"/>
-                <a:ea typeface="맑은 고딕"/>
-              </a:rPr>
-              <a:t>잘못된 관행</a:t>
-            </a:r>
-            <a:r>
-              <a:rPr sz="1800" b="0">
-                <a:solidFill>
-                  <a:srgbClr val="000000"/>
-                </a:solidFill>
-                <a:latin typeface="맑은 고딕"/>
-                <a:ea typeface="맑은 고딕"/>
-              </a:rPr>
-              <a:t> —</a:t>
-            </a:r>
-            <a:r>
-              <a:rPr sz="1600" b="0">
-                <a:solidFill>
-                  <a:srgbClr val="000000"/>
-                </a:solidFill>
-                <a:latin typeface="맑은 고딕"/>
-                <a:ea typeface="맑은 고딕"/>
-              </a:rPr>
-              <a:t> 증상 위치에서 고치기, 테스트를 코드에 맞추기, 느린 feedback</a:t>
-            </a:r>
-          </a:p>
-          <a:p>
-            <a:pPr marL="342900" indent="0">
+              <a:rPr sz="1400" b="1">
+                <a:solidFill>
+                  <a:srgbClr val="000000"/>
+                </a:solidFill>
+                <a:latin typeface="맑은 고딕"/>
+                <a:ea typeface="맑은 고딕"/>
+              </a:rPr>
+              <a:t>※ 현행화 기준</a:t>
+            </a:r>
+          </a:p>
+          <a:p>
+            <a:pPr lvl="3" marL="457200" indent="-182880">
               <a:spcBef>
-                <a:spcPts val="600"/>
+                <a:spcPts val="300"/>
               </a:spcBef>
               <a:spcAft>
-                <a:spcPts val="600"/>
-              </a:spcAft>
-              <a:buNone/>
-            </a:pPr>
-            <a:r>
-              <a:rPr sz="1800" b="1">
-                <a:solidFill>
-                  <a:srgbClr val="000000"/>
-                </a:solidFill>
-                <a:latin typeface="맑은 고딕"/>
-                <a:ea typeface="맑은 고딕"/>
-              </a:rPr>
-              <a:t>다음 세션</a:t>
-            </a:r>
-          </a:p>
-          <a:p>
-            <a:pPr lvl="2" marL="723900" indent="-368300">
-              <a:spcBef>
-                <a:spcPts val="600"/>
-              </a:spcBef>
-              <a:spcAft>
-                <a:spcPts val="600"/>
+                <a:spcPts val="300"/>
               </a:spcAft>
               <a:buSzPct val="90000"/>
               <a:buFont typeface="Wingdings" pitchFamily="2" charset="2"/>
-              <a:buChar char=""/>
+              <a:buChar char=""/>
             </a:pPr>
             <a:r>
-              <a:rPr sz="1800" b="0">
-                <a:solidFill>
-                  <a:srgbClr val="000000"/>
-                </a:solidFill>
-                <a:latin typeface="맑은 고딕"/>
-                <a:ea typeface="맑은 고딕"/>
-              </a:rPr>
-              <a:t>"</a:t>
-            </a:r>
-            <a:r>
-              <a:rPr sz="1800" b="1">
-                <a:solidFill>
-                  <a:srgbClr val="000000"/>
-                </a:solidFill>
-                <a:latin typeface="맑은 고딕"/>
-                <a:ea typeface="맑은 고딕"/>
-              </a:rPr>
-              <a:t>13. OOAD에서 전문영역으로 —</a:t>
-            </a:r>
-            <a:r>
-              <a:rPr sz="1600" b="1">
-                <a:solidFill>
-                  <a:srgbClr val="000000"/>
-                </a:solidFill>
-                <a:latin typeface="맑은 고딕"/>
-                <a:ea typeface="맑은 고딕"/>
-              </a:rPr>
-              <a:t> Architecture · DDD · MSA</a:t>
-            </a:r>
-            <a:r>
-              <a:rPr sz="1600" b="0">
-                <a:solidFill>
-                  <a:srgbClr val="000000"/>
-                </a:solidFill>
-                <a:latin typeface="맑은 고딕"/>
-                <a:ea typeface="맑은 고딕"/>
-              </a:rPr>
-              <a:t>" — OOAD의 판단과 전문영역이 더 소유하는 판단을 구분한다.</a:t>
+              <a:rPr sz="1200" b="1">
+                <a:solidFill>
+                  <a:srgbClr val="000000"/>
+                </a:solidFill>
+                <a:latin typeface="맑은 고딕"/>
+                <a:ea typeface="맑은 고딕"/>
+              </a:rPr>
+              <a:t>반영</a:t>
+            </a:r>
+            <a:r>
+              <a:rPr sz="1200" b="0">
+                <a:solidFill>
+                  <a:srgbClr val="000000"/>
+                </a:solidFill>
+                <a:latin typeface="맑은 고딕"/>
+                <a:ea typeface="맑은 고딕"/>
+              </a:rPr>
+              <a:t> —</a:t>
+            </a:r>
+            <a:r>
+              <a:rPr sz="1000" b="0">
+                <a:solidFill>
+                  <a:srgbClr val="000000"/>
+                </a:solidFill>
+                <a:latin typeface="맑은 고딕"/>
+                <a:ea typeface="맑은 고딕"/>
+              </a:rPr>
+              <a:t> 상태 기계, 용어집, 계약, 유스케이스.</a:t>
+            </a:r>
+          </a:p>
+          <a:p>
+            <a:pPr lvl="3" marL="457200" indent="-182880">
+              <a:spcBef>
+                <a:spcPts val="300"/>
+              </a:spcBef>
+              <a:spcAft>
+                <a:spcPts val="300"/>
+              </a:spcAft>
+              <a:buSzPct val="90000"/>
+              <a:buFont typeface="Wingdings" pitchFamily="2" charset="2"/>
+              <a:buChar char=""/>
+            </a:pPr>
+            <a:r>
+              <a:rPr sz="1200" b="1">
+                <a:solidFill>
+                  <a:srgbClr val="000000"/>
+                </a:solidFill>
+                <a:latin typeface="맑은 고딕"/>
+                <a:ea typeface="맑은 고딕"/>
+              </a:rPr>
+              <a:t>기록만</a:t>
+            </a:r>
+            <a:r>
+              <a:rPr sz="1200" b="0">
+                <a:solidFill>
+                  <a:srgbClr val="000000"/>
+                </a:solidFill>
+                <a:latin typeface="맑은 고딕"/>
+                <a:ea typeface="맑은 고딕"/>
+              </a:rPr>
+              <a:t> —</a:t>
+            </a:r>
+            <a:r>
+              <a:rPr sz="1000" b="0">
+                <a:solidFill>
+                  <a:srgbClr val="000000"/>
+                </a:solidFill>
+                <a:latin typeface="맑은 고딕"/>
+                <a:ea typeface="맑은 고딕"/>
+              </a:rPr>
+              <a:t> 운영 지표의 정의.</a:t>
             </a:r>
           </a:p>
         </p:txBody>
@@ -27428,8 +27371,8 @@
           </p:nvPr>
         </p:nvGraphicFramePr>
         <p:xfrm>
-          <a:off x="1815656" y="2100036"/>
-          <a:ext cx="5499100" cy="3873500"/>
+          <a:off x="1773746" y="2100036"/>
+          <a:ext cx="5582920" cy="3873500"/>
         </p:xfrm>
         <a:graphic>
           <a:graphicData uri="http://schemas.openxmlformats.org/drawingml/2006/table">
@@ -27437,7 +27380,7 @@
               <a:tblPr/>
               <a:tblGrid>
                 <a:gridCol w="3042920"/>
-                <a:gridCol w="2456180"/>
+                <a:gridCol w="2540000"/>
               </a:tblGrid>
               <a:tr h="288000">
                 <a:tc>
@@ -27646,7 +27589,7 @@
                           <a:ea typeface="맑은 고딕" panose="020B0503020000020004" pitchFamily="34" charset="-127"/>
                           <a:cs typeface="맑은 고딕"/>
                         </a:rPr>
-                        <a:t>왜 같은 통보가 두 번 왔는가</a:t>
+                        <a:t>왜 같은 통보가 두 번 왔는가?</a:t>
                       </a:r>
                     </a:p>
                   </a:txBody>
@@ -27758,7 +27701,7 @@
                           <a:ea typeface="맑은 고딕" panose="020B0503020000020004" pitchFamily="34" charset="-127"/>
                           <a:cs typeface="맑은 고딕"/>
                         </a:rPr>
-                        <a:t>두 번 오는 것이 정상인가</a:t>
+                        <a:t>두 번 오는 것이 정상인가?</a:t>
                       </a:r>
                     </a:p>
                   </a:txBody>
@@ -27870,7 +27813,7 @@
                           <a:ea typeface="맑은 고딕" panose="020B0503020000020004" pitchFamily="34" charset="-127"/>
                           <a:cs typeface="맑은 고딕"/>
                         </a:rPr>
-                        <a:t>누가 이 경우를 정했어야 했는가</a:t>
+                        <a:t>누가 이 경우를 정했어야 했는가?</a:t>
                       </a:r>
                     </a:p>
                   </a:txBody>

--- a/courses/ooad/sessions/s12.pptx
+++ b/courses/ooad/sessions/s12.pptx
@@ -696,14 +696,14 @@
             <a:pPr lvl="0"/>
             <a:r>
               <a:rPr lang="ko-KR" sz="1200"/>
-              <a:t>테스트의 1번은 리팩터링 뒤 "11. 통합 설계와 적정 모델링"의 통합 테스트를 다시 돌린다 — 회귀 테스트다.</a:t>
+              <a:t>테스트의 1번은 리팩터링 뒤 "세션 11. 통합 설계와 적정 모델링"의 통합 테스트를 다시 돌린다 — 회귀 테스트다.</a:t>
             </a:r>
           </a:p>
           <a:p>
             <a:pPr lvl="0"/>
             <a:r>
               <a:rPr lang="ko-KR" sz="1200"/>
-              <a:t>업무 규칙은 여전히 Order에 있다. 리팩터링이 서비스에 규칙을 끌어들이지 않았는지도 확인한다("07. 책임·협력·계약").</a:t>
+              <a:t>업무 규칙은 여전히 Order에 있다. 리팩터링이 서비스에 규칙을 끌어들이지 않았는지도 확인한다("세션 07. 책임·협력·계약").</a:t>
             </a:r>
           </a:p>
         </p:txBody>
@@ -771,7 +771,7 @@
             <a:pPr lvl="0"/>
             <a:r>
               <a:rPr lang="ko-KR" sz="1200"/>
-              <a:t>값 타입("03. 정적 모델 — 도메인 개념과 관계"의 속성 규칙)은 IDE 층의 검사를 가능하게 한다. int 두 개였다면 단가와 수량을 바꿔 넣어도 컴파일된다.</a:t>
+              <a:t>값 타입("세션 03. 정적 모델 — 도메인 개념과 관계"의 속성 규칙)은 IDE 층의 검사를 가능하게 한다. int 두 개였다면 단가와 수량을 바꿔 넣어도 컴파일된다.</a:t>
             </a:r>
           </a:p>
         </p:txBody>
@@ -839,7 +839,7 @@
             <a:pPr lvl="0"/>
             <a:r>
               <a:rPr lang="ko-KR" sz="1200"/>
-              <a:t>3번은 "05. 구조적 경계와 의존성"의 의존 규칙을 코드로 지키는 검사다. 규칙이 문서에만 있으면 조용히 깨진다.</a:t>
+              <a:t>3번은 "세션 05. 구조적 경계와 의존성"의 의존 규칙을 코드로 지키는 검사다. 규칙이 문서에만 있으면 조용히 깨진다.</a:t>
             </a:r>
           </a:p>
         </p:txBody>
@@ -900,7 +900,7 @@
             <a:pPr lvl="0"/>
             <a:r>
               <a:rPr lang="ko-KR" sz="1200"/>
-              <a:t>"11. 통합 설계와 적정 모델링"의 빈틈은 표의 마지막 행이다 — 통합 테스트가 실패했고, 매핑 표와 결정 기록을 다시 열었다.</a:t>
+              <a:t>"세션 11. 통합 설계와 적정 모델링"의 빈틈은 표의 마지막 행이다 — 통합 테스트가 실패했고, 매핑 표와 결정 기록을 다시 열었다.</a:t>
             </a:r>
           </a:p>
           <a:p>
@@ -975,7 +975,7 @@
             <a:pPr lvl="0"/>
             <a:r>
               <a:rPr lang="ko-KR" sz="1200"/>
-              <a:t>이 과정은 배포 도구를 다루지 않는다. 설계에 주는 요구만 본다 — 작은 변경이 독립적으로 나갈 수 있도록 경계가 나뉘어 있어야 한다("05. 구조적 경계와 의존성").</a:t>
+              <a:t>이 과정은 배포 도구를 다루지 않는다. 설계에 주는 요구만 본다 — 작은 변경이 독립적으로 나갈 수 있도록 경계가 나뉘어 있어야 한다("세션 05. 구조적 경계와 의존성").</a:t>
             </a:r>
           </a:p>
         </p:txBody>
@@ -1036,7 +1036,7 @@
             <a:pPr lvl="0"/>
             <a:r>
               <a:rPr lang="ko-KR" sz="1200"/>
-              <a:t>둘째 행은 "02. 요구 분석과 유스케이스"의 예외 흐름 1a2a에서 추가 확인 대상으로 남긴 것이다. 운영 신호가 그 확인을 요구한다.</a:t>
+              <a:t>둘째 행은 "세션 02. 요구 분석과 유스케이스"의 예외 흐름 1a2a에서 추가 확인 대상으로 남긴 것이다. 운영 신호가 그 확인을 요구한다.</a:t>
             </a:r>
           </a:p>
           <a:p>
@@ -1240,7 +1240,7 @@
             <a:pPr lvl="0"/>
             <a:r>
               <a:rPr lang="ko-KR" sz="1200"/>
-              <a:t>입력은 "11. 통합 설계와 적정 모델링"까지의 설계·코드·테스트다. 테스트 도구나 CI 제품의 사용법은 이 세션의 대상이 아니다. feedback이 어느 판단으로 되돌아가는가를 다룬다.</a:t>
+              <a:t>입력은 "세션 11. 통합 설계와 적정 모델링"까지의 설계·코드·테스트다. 테스트 도구나 CI 제품의 사용법은 이 세션의 대상이 아니다. feedback이 어느 판단으로 되돌아가는가를 다룬다.</a:t>
             </a:r>
           </a:p>
           <a:p>
@@ -1315,7 +1315,7 @@
             <a:pPr lvl="0"/>
             <a:r>
               <a:rPr lang="ko-KR" sz="1200"/>
-              <a:t>외부 시스템 약속은 "02. 요구 분석과 유스케이스"의 지원 액터 설명(동기·비동기)에 더한다.</a:t>
+              <a:t>외부 시스템 약속은 "세션 02. 요구 분석과 유스케이스"의 지원 액터 설명(동기·비동기)에 더한다.</a:t>
             </a:r>
           </a:p>
         </p:txBody>
@@ -1383,7 +1383,7 @@
             <a:pPr lvl="0"/>
             <a:r>
               <a:rPr lang="ko-KR" sz="1200"/>
-              <a:t>도식은 취소 경로만 보인다. 전체 상태 기계는 "04. 동적 모델 — 상호작용과 상태"의 것에 이 전이 하나를 더한다.</a:t>
+              <a:t>도식은 취소 경로만 보인다. 전체 상태 기계는 "세션 04. 동적 모델 — 상호작용과 상태"의 것에 이 전이 하나를 더한다.</a:t>
             </a:r>
           </a:p>
         </p:txBody>
@@ -1444,7 +1444,7 @@
             <a:pPr lvl="0"/>
             <a:r>
               <a:rPr lang="ko-KR" sz="1200"/>
-              <a:t>"11. 통합 설계와 적정 모델링"의 빈틈은 짧게, 중복 통보는 길게 되돌아갔다. 되돌아간 거리가 길수록 비용이 크다 — 그래서 위험 주도 모델링은 외부 통보 같은 곳을 먼저 모델링한다.</a:t>
+              <a:t>"세션 11. 통합 설계와 적정 모델링"의 빈틈은 짧게, 중복 통보는 길게 되돌아갔다. 되돌아간 거리가 길수록 비용이 크다 — 그래서 위험 주도 모델링은 외부 통보 같은 곳을 먼저 모델링한다.</a:t>
             </a:r>
           </a:p>
         </p:txBody>
@@ -1505,7 +1505,7 @@
             <a:pPr lvl="0"/>
             <a:r>
               <a:rPr lang="ko-KR" sz="1200"/>
-              <a:t>예외를 삼키는 수정은 "10. 기술 제약과 도메인 의미 보존"의 조용한 기본값과 같은 모양이다. 틀린 상태를 조용히 만든다.</a:t>
+              <a:t>예외를 삼키는 수정은 "세션 10. 기술 제약과 도메인 의미 보존"의 조용한 기본값과 같은 모양이다. 틀린 상태를 조용히 만든다.</a:t>
             </a:r>
           </a:p>
         </p:txBody>
@@ -1566,7 +1566,7 @@
             <a:pPr lvl="0"/>
             <a:r>
               <a:rPr lang="ko-KR" sz="1200"/>
-              <a:t>LLM에게 "테스트를 통과시켜 줘"라고 하면 이 관행이 쉽게 나온다. 테스트의 기대값은 사람이 판단한 결정이라는 점을 LLM에게 명시한다("14. AI-native SW공학"과 연결).</a:t>
+              <a:t>LLM에게 "테스트를 통과시켜 줘"라고 하면 이 관행이 쉽게 나온다. 테스트의 기대값은 사람이 판단한 결정이라는 점을 LLM에게 명시한다("세션 14. AI-native SW공학"과 연결).</a:t>
             </a:r>
           </a:p>
         </p:txBody>
@@ -1953,7 +1953,7 @@
             <a:pPr lvl="0"/>
             <a:r>
               <a:rPr lang="ko-KR" sz="1200"/>
-              <a:t>"01. OOAD 개요"의 결정과 검증이 여기서 닫힌다. 앞 세션들이 결정을 만들었고, 이 세션은 구현의 evidence로 그 결정을 검증하고 필요하면 다시 연다.</a:t>
+              <a:t>"세션 01. OOAD 개요"의 결정과 검증이 여기서 닫힌다. 앞 세션들이 결정을 만들었고, 이 세션은 구현의 evidence로 그 결정을 검증하고 필요하면 다시 연다.</a:t>
             </a:r>
           </a:p>
         </p:txBody>
@@ -5071,7 +5071,7 @@
           </p:nvPr>
         </p:nvGraphicFramePr>
         <p:xfrm>
-          <a:off x="1885506" y="3315123"/>
+          <a:off x="1885506" y="3149138"/>
           <a:ext cx="5359400" cy="3873500"/>
         </p:xfrm>
         <a:graphic>
@@ -5571,7 +5571,7 @@
         <p:spPr>
           <a:xfrm>
             <a:off x="365760" y="960120"/>
-            <a:ext cx="8412480" cy="2253403"/>
+            <a:ext cx="8412480" cy="2101517"/>
           </a:xfrm>
           <a:prstGeom prst="rect">
             <a:avLst/>
@@ -6531,7 +6531,7 @@
           </p:nvPr>
         </p:nvGraphicFramePr>
         <p:xfrm>
-          <a:off x="2012506" y="3058085"/>
+          <a:off x="2012506" y="3036916"/>
           <a:ext cx="5105400" cy="3873500"/>
         </p:xfrm>
         <a:graphic>
@@ -7850,7 +7850,7 @@
           </p:nvPr>
         </p:nvGraphicFramePr>
         <p:xfrm>
-          <a:off x="2209356" y="3058085"/>
+          <a:off x="2209356" y="2874818"/>
           <a:ext cx="4711700" cy="3873500"/>
         </p:xfrm>
         <a:graphic>
@@ -8757,7 +8757,7 @@
         <p:spPr>
           <a:xfrm>
             <a:off x="365760" y="960120"/>
-            <a:ext cx="8412480" cy="1996365"/>
+            <a:ext cx="8412480" cy="1844479"/>
           </a:xfrm>
           <a:prstGeom prst="rect">
             <a:avLst/>
@@ -9159,7 +9159,7 @@
           </p:nvPr>
         </p:nvGraphicFramePr>
         <p:xfrm>
-          <a:off x="2599246" y="1842998"/>
+          <a:off x="2599246" y="1813560"/>
           <a:ext cx="3931920" cy="3873500"/>
         </p:xfrm>
         <a:graphic>
@@ -10220,7 +10220,7 @@
         </p:nvSpPr>
         <p:spPr>
           <a:xfrm>
-            <a:off x="365760" y="3384598"/>
+            <a:off x="365760" y="3482160"/>
             <a:ext cx="8412480" cy="781278"/>
           </a:xfrm>
           <a:prstGeom prst="rect">
@@ -10447,7 +10447,7 @@
           </p:nvPr>
         </p:nvGraphicFramePr>
         <p:xfrm>
-          <a:off x="1858836" y="2649162"/>
+          <a:off x="1858836" y="2438400"/>
           <a:ext cx="5412740" cy="3873500"/>
         </p:xfrm>
         <a:graphic>
@@ -11186,7 +11186,7 @@
         <p:spPr>
           <a:xfrm>
             <a:off x="365760" y="960120"/>
-            <a:ext cx="8412480" cy="1587442"/>
+            <a:ext cx="8412480" cy="1435556"/>
           </a:xfrm>
           <a:prstGeom prst="rect">
             <a:avLst/>
@@ -11578,7 +11578,7 @@
           </p:nvPr>
         </p:nvGraphicFramePr>
         <p:xfrm>
-          <a:off x="1731835" y="2100036"/>
+          <a:off x="1731835" y="2087880"/>
           <a:ext cx="5666740" cy="3873500"/>
         </p:xfrm>
         <a:graphic>
@@ -12344,7 +12344,7 @@
         </p:nvSpPr>
         <p:spPr>
           <a:xfrm>
-            <a:off x="365760" y="3641636"/>
+            <a:off x="365760" y="3756480"/>
             <a:ext cx="8412480" cy="781278"/>
           </a:xfrm>
           <a:prstGeom prst="rect">
@@ -12571,7 +12571,7 @@
           </p:nvPr>
         </p:nvGraphicFramePr>
         <p:xfrm>
-          <a:off x="1480376" y="3724047"/>
+          <a:off x="1480376" y="3585556"/>
           <a:ext cx="6169660" cy="3873500"/>
         </p:xfrm>
         <a:graphic>
@@ -12959,7 +12959,7 @@
         <p:spPr>
           <a:xfrm>
             <a:off x="365760" y="960120"/>
-            <a:ext cx="8412480" cy="2662327"/>
+            <a:ext cx="8412480" cy="2510441"/>
           </a:xfrm>
           <a:prstGeom prst="rect">
             <a:avLst/>
@@ -13371,7 +13371,7 @@
           </p:nvPr>
         </p:nvGraphicFramePr>
         <p:xfrm>
-          <a:off x="1998536" y="3058085"/>
+          <a:off x="1998536" y="2874818"/>
           <a:ext cx="5133340" cy="3873500"/>
         </p:xfrm>
         <a:graphic>
@@ -14446,7 +14446,7 @@
         <p:spPr>
           <a:xfrm>
             <a:off x="365760" y="960120"/>
-            <a:ext cx="8412480" cy="1996365"/>
+            <a:ext cx="8412480" cy="1844479"/>
           </a:xfrm>
           <a:prstGeom prst="rect">
             <a:avLst/>
@@ -14703,7 +14703,7 @@
         </p:nvSpPr>
         <p:spPr>
           <a:xfrm>
-            <a:off x="365760" y="4887685"/>
+            <a:off x="365760" y="4831418"/>
             <a:ext cx="8412480" cy="781278"/>
           </a:xfrm>
           <a:prstGeom prst="rect">
@@ -15433,7 +15433,7 @@
           </p:nvPr>
         </p:nvGraphicFramePr>
         <p:xfrm>
-          <a:off x="1369886" y="2100036"/>
+          <a:off x="1369886" y="2087880"/>
           <a:ext cx="6390640" cy="3873500"/>
         </p:xfrm>
         <a:graphic>
@@ -16504,7 +16504,7 @@
         </p:nvSpPr>
         <p:spPr>
           <a:xfrm>
-            <a:off x="365760" y="3641636"/>
+            <a:off x="365760" y="3756480"/>
             <a:ext cx="8412480" cy="781278"/>
           </a:xfrm>
           <a:prstGeom prst="rect">
@@ -16893,7 +16893,7 @@
         </p:blipFill>
         <p:spPr>
           <a:xfrm>
-            <a:off x="3661019" y="3043202"/>
+            <a:off x="3661019" y="2087880"/>
             <a:ext cx="1821962" cy="2413000"/>
           </a:xfrm>
           <a:prstGeom prst="rect">
@@ -17070,7 +17070,7 @@
           </p:nvPr>
         </p:nvGraphicFramePr>
         <p:xfrm>
-          <a:off x="1872806" y="2100036"/>
+          <a:off x="1872806" y="2087880"/>
           <a:ext cx="5384800" cy="3873500"/>
         </p:xfrm>
         <a:graphic>
@@ -18131,7 +18131,7 @@
         </p:nvSpPr>
         <p:spPr>
           <a:xfrm>
-            <a:off x="365760" y="3641636"/>
+            <a:off x="365760" y="3756480"/>
             <a:ext cx="8412480" cy="781278"/>
           </a:xfrm>
           <a:prstGeom prst="rect">
@@ -20983,7 +20983,7 @@
           </p:nvPr>
         </p:nvGraphicFramePr>
         <p:xfrm>
-          <a:off x="1775016" y="1842998"/>
+          <a:off x="1775016" y="1813560"/>
           <a:ext cx="5580380" cy="3873500"/>
         </p:xfrm>
         <a:graphic>
@@ -22054,7 +22054,7 @@
         </p:nvSpPr>
         <p:spPr>
           <a:xfrm>
-            <a:off x="365760" y="3384598"/>
+            <a:off x="365760" y="3482160"/>
             <a:ext cx="8412480" cy="781278"/>
           </a:xfrm>
           <a:prstGeom prst="rect">
@@ -22323,7 +22323,7 @@
           </p:nvPr>
         </p:nvGraphicFramePr>
         <p:xfrm>
-          <a:off x="1747076" y="1842998"/>
+          <a:off x="1747076" y="1813560"/>
           <a:ext cx="5636260" cy="3873500"/>
         </p:xfrm>
         <a:graphic>
@@ -24815,7 +24815,7 @@
           </p:nvPr>
         </p:nvGraphicFramePr>
         <p:xfrm>
-          <a:off x="1830896" y="2100036"/>
+          <a:off x="1830896" y="2087880"/>
           <a:ext cx="5468620" cy="3873500"/>
         </p:xfrm>
         <a:graphic>
@@ -25520,7 +25520,7 @@
         </p:nvSpPr>
         <p:spPr>
           <a:xfrm>
-            <a:off x="365760" y="3065636"/>
+            <a:off x="365760" y="3180480"/>
             <a:ext cx="8412480" cy="781278"/>
           </a:xfrm>
           <a:prstGeom prst="rect">
@@ -25553,7 +25553,7 @@
                 <a:latin typeface="맑은 고딕"/>
                 <a:ea typeface="맑은 고딕"/>
               </a:rPr>
-              <a:t>첫째는 "11. 통합 설계와 적정 모델링"에서 찾아 고쳤다. 이 세션은 둘째를 </a:t>
+              <a:t>첫째는 "세션 11. 통합 설계와 적정 모델링"에서 찾아 고쳤다. 이 세션은 둘째를 </a:t>
             </a:r>
             <a:r>
               <a:rPr sz="1800" b="1">
@@ -25747,7 +25747,7 @@
           </p:nvPr>
         </p:nvGraphicFramePr>
         <p:xfrm>
-          <a:off x="2277936" y="2100036"/>
+          <a:off x="2277936" y="2087880"/>
           <a:ext cx="4574540" cy="3873500"/>
         </p:xfrm>
         <a:graphic>
@@ -27144,7 +27144,7 @@
         </p:nvSpPr>
         <p:spPr>
           <a:xfrm>
-            <a:off x="365760" y="4217636"/>
+            <a:off x="365760" y="4332480"/>
             <a:ext cx="8412480" cy="781278"/>
           </a:xfrm>
           <a:prstGeom prst="rect">
@@ -27371,7 +27371,7 @@
           </p:nvPr>
         </p:nvGraphicFramePr>
         <p:xfrm>
-          <a:off x="1773746" y="2100036"/>
+          <a:off x="1773746" y="2087880"/>
           <a:ext cx="5582920" cy="3873500"/>
         </p:xfrm>
         <a:graphic>
@@ -28075,7 +28075,7 @@
         </p:nvSpPr>
         <p:spPr>
           <a:xfrm>
-            <a:off x="365760" y="3353636"/>
+            <a:off x="365760" y="3468480"/>
             <a:ext cx="8412480" cy="781278"/>
           </a:xfrm>
           <a:prstGeom prst="rect">
@@ -28302,7 +28302,7 @@
           </p:nvPr>
         </p:nvGraphicFramePr>
         <p:xfrm>
-          <a:off x="2444306" y="3058085"/>
+          <a:off x="2444306" y="2874818"/>
           <a:ext cx="4241800" cy="3873500"/>
         </p:xfrm>
         <a:graphic>
@@ -28914,7 +28914,7 @@
         <p:spPr>
           <a:xfrm>
             <a:off x="365760" y="960120"/>
-            <a:ext cx="8412480" cy="1996365"/>
+            <a:ext cx="8412480" cy="1844479"/>
           </a:xfrm>
           <a:prstGeom prst="rect">
             <a:avLst/>
@@ -29171,7 +29171,7 @@
         </p:nvSpPr>
         <p:spPr>
           <a:xfrm>
-            <a:off x="365760" y="4599685"/>
+            <a:off x="365760" y="4543418"/>
             <a:ext cx="8412480" cy="781278"/>
           </a:xfrm>
           <a:prstGeom prst="rect">
@@ -29398,7 +29398,7 @@
           </p:nvPr>
         </p:nvGraphicFramePr>
         <p:xfrm>
-          <a:off x="1860106" y="2649162"/>
+          <a:off x="1860106" y="2600498"/>
           <a:ext cx="5410200" cy="3873500"/>
         </p:xfrm>
         <a:graphic>
@@ -30354,7 +30354,7 @@
         </p:nvSpPr>
         <p:spPr>
           <a:xfrm>
-            <a:off x="365760" y="3902762"/>
+            <a:off x="365760" y="3981098"/>
             <a:ext cx="8412480" cy="781278"/>
           </a:xfrm>
           <a:prstGeom prst="rect">
@@ -30844,7 +30844,7 @@
         </p:nvSpPr>
         <p:spPr>
           <a:xfrm>
-            <a:off x="365760" y="3027136"/>
+            <a:off x="365760" y="3154136"/>
             <a:ext cx="8412480" cy="781278"/>
           </a:xfrm>
           <a:prstGeom prst="rect">

--- a/courses/ooad/sessions/s12.pptx
+++ b/courses/ooad/sessions/s12.pptx
@@ -10116,7 +10116,7 @@
                 <a:latin typeface="맑은 고딕"/>
                 <a:ea typeface="맑은 고딕"/>
               </a:rPr>
-              <a:t> 났는지로 먼저 볼 판단 수준을 좁힌다. 표의 오른쪽 열이 그 단계가 실패했을 때 </a:t>
+              <a:t> 났는지로 먼저 볼 판단 수준을 좁힌다. 빌드가 깨지면 코드를, 의존 규칙이 깨지면 </a:t>
             </a:r>
             <a:r>
               <a:rPr sz="1800" b="1">
@@ -10126,7 +10126,7 @@
                 <a:latin typeface="맑은 고딕"/>
                 <a:ea typeface="맑은 고딕"/>
               </a:rPr>
-              <a:t>먼저 여는</a:t>
+              <a:t>아키텍처</a:t>
             </a:r>
             <a:r>
               <a:rPr sz="1800" b="0">
@@ -10136,7 +10136,7 @@
                 <a:latin typeface="맑은 고딕"/>
                 <a:ea typeface="맑은 고딕"/>
               </a:rPr>
-              <a:t> 산출물이다.</a:t>
+              <a:t>를 먼저 연다.</a:t>
             </a:r>
           </a:p>
         </p:txBody>
@@ -12571,7 +12571,7 @@
           </p:nvPr>
         </p:nvGraphicFramePr>
         <p:xfrm>
-          <a:off x="1480376" y="3585556"/>
+          <a:off x="1480376" y="3311236"/>
           <a:ext cx="6169660" cy="3873500"/>
         </p:xfrm>
         <a:graphic>
@@ -12959,7 +12959,7 @@
         <p:spPr>
           <a:xfrm>
             <a:off x="365760" y="960120"/>
-            <a:ext cx="8412480" cy="2510441"/>
+            <a:ext cx="8412480" cy="2253403"/>
           </a:xfrm>
           <a:prstGeom prst="rect">
             <a:avLst/>
@@ -13029,7 +13029,27 @@
                 <a:latin typeface="맑은 고딕"/>
                 <a:ea typeface="맑은 고딕"/>
               </a:rPr>
-              <a:t>를 짧게 만든다. 아래 표의 첫 행이 왼쪽에서 오른쪽으로 가는 흐름, 둘째 행이 O-1의 feedback이 되돌아간 길이다.</a:t>
+              <a:t>를 짧게 만든다. O-1에서는 운영의 중복 통보가 테스트·계약·상태 기계를 거쳐 </a:t>
+            </a:r>
+            <a:r>
+              <a:rPr sz="1800" b="1">
+                <a:solidFill>
+                  <a:srgbClr val="000000"/>
+                </a:solidFill>
+                <a:latin typeface="맑은 고딕"/>
+                <a:ea typeface="맑은 고딕"/>
+              </a:rPr>
+              <a:t>요구까지</a:t>
+            </a:r>
+            <a:r>
+              <a:rPr sz="1800" b="0">
+                <a:solidFill>
+                  <a:srgbClr val="000000"/>
+                </a:solidFill>
+                <a:latin typeface="맑은 고딕"/>
+                <a:ea typeface="맑은 고딕"/>
+              </a:rPr>
+              <a:t> 되돌아갔다.</a:t>
             </a:r>
           </a:p>
           <a:p>
@@ -27040,7 +27060,7 @@
                 <a:latin typeface="맑은 고딕"/>
                 <a:ea typeface="맑은 고딕"/>
               </a:rPr>
-              <a:t>에서 온다. 위의 층일수록 빠르고 싸며, 아래로 갈수록 느리지만 실제에 가깝다. 표의 오른쪽 열이 각 층이 O-1에 대해 </a:t>
+              <a:t>에서 온다. 위의 층일수록 빠르고 싸며, 아래로 갈수록 느리지만 실제에 가깝다. IDE는 컴파일 오류를, 운영은 </a:t>
             </a:r>
             <a:r>
               <a:rPr sz="1800" b="1">
@@ -27050,7 +27070,7 @@
                 <a:latin typeface="맑은 고딕"/>
                 <a:ea typeface="맑은 고딕"/>
               </a:rPr>
-              <a:t>알려 주는 것</a:t>
+              <a:t>실제 외부 시스템의 행동</a:t>
             </a:r>
             <a:r>
               <a:rPr sz="1800" b="0">
@@ -27060,7 +27080,7 @@
                 <a:latin typeface="맑은 고딕"/>
                 <a:ea typeface="맑은 고딕"/>
               </a:rPr>
-              <a:t>이다.</a:t>
+              <a:t>을 알려 준다.</a:t>
             </a:r>
           </a:p>
         </p:txBody>
